--- a/答辩PPT.pptx
+++ b/答辩PPT.pptx
@@ -13,9 +13,10 @@
     <p:sldId id="261" r:id="rId7"/>
     <p:sldId id="262" r:id="rId8"/>
     <p:sldId id="263" r:id="rId9"/>
+    <p:sldId id="264" r:id="rId10"/>
   </p:sldIdLst>
   <p:notesMasterIdLst>
-    <p:notesMasterId r:id="rId10"/>
+    <p:notesMasterId r:id="rId11"/>
   </p:notesMasterIdLst>
   <p:sldSz cx="9144000" cy="5143500"/>
   <p:notesSz cx="5143500" cy="9144000"/>
@@ -1149,6 +1150,94 @@
             <a:fld id="{F7021451-1387-4CA6-816F-3879F97B5CBC}" type="slidenum">
               <a:rPr lang="en-US"/>
               <a:t>8</a:t>
+            </a:fld>
+            <a:endParaRPr lang="en-US"/>
+          </a:p>
+        </p:txBody>
+      </p:sp>
+    </p:spTree>
+    <p:extLst>
+      <p:ext uri="{BB962C8B-B14F-4D97-AF65-F5344CB8AC3E}">
+        <p14:creationId xmlns:p14="http://schemas.microsoft.com/office/powerpoint/2010/main" val="1024086991"/>
+      </p:ext>
+    </p:extLst>
+  </p:cSld>
+  <p:clrMapOvr>
+    <a:masterClrMapping/>
+  </p:clrMapOvr>
+</p:notes>
+</file>
+
+<file path=ppt/notesSlides/notesSlide9.xml><?xml version="1.0" encoding="utf-8"?>
+<p:notes xmlns:a="http://schemas.openxmlformats.org/drawingml/2006/main" xmlns:r="http://schemas.openxmlformats.org/officeDocument/2006/relationships" xmlns:p="http://schemas.openxmlformats.org/presentationml/2006/main">
+  <p:cSld>
+    <p:spTree>
+      <p:nvGrpSpPr>
+        <p:cNvPr id="1" name=""/>
+        <p:cNvGrpSpPr/>
+        <p:nvPr/>
+      </p:nvGrpSpPr>
+      <p:grpSpPr>
+        <a:xfrm>
+          <a:off x="0" y="0"/>
+          <a:ext cx="0" cy="0"/>
+          <a:chOff x="0" y="0"/>
+          <a:chExt cx="0" cy="0"/>
+        </a:xfrm>
+      </p:grpSpPr>
+      <p:sp>
+        <p:nvSpPr>
+          <p:cNvPr id="2" name="Slide Image Placeholder 1"/>
+          <p:cNvSpPr>
+            <a:spLocks noGrp="1" noRot="1" noChangeAspect="1"/>
+          </p:cNvSpPr>
+          <p:nvPr>
+            <p:ph type="sldImg"/>
+          </p:nvPr>
+        </p:nvSpPr>
+        <p:spPr/>
+      </p:sp>
+      <p:sp>
+        <p:nvSpPr>
+          <p:cNvPr id="3" name="Notes Placeholder 2"/>
+          <p:cNvSpPr>
+            <a:spLocks noGrp="1"/>
+          </p:cNvSpPr>
+          <p:nvPr>
+            <p:ph type="body" idx="1"/>
+          </p:nvPr>
+        </p:nvSpPr>
+        <p:spPr/>
+        <p:txBody>
+          <a:bodyPr/>
+          <a:lstStyle/>
+          <a:p>
+            <a:r>
+              <a:rPr lang="en-US" dirty="0"/>
+              <a:t/>
+            </a:r>
+            <a:endParaRPr lang="en-US" dirty="0"/>
+          </a:p>
+        </p:txBody>
+      </p:sp>
+      <p:sp>
+        <p:nvSpPr>
+          <p:cNvPr id="4" name="Slide Number Placeholder 3"/>
+          <p:cNvSpPr>
+            <a:spLocks noGrp="1"/>
+          </p:cNvSpPr>
+          <p:nvPr>
+            <p:ph type="sldNum" sz="quarter" idx="10"/>
+          </p:nvPr>
+        </p:nvSpPr>
+        <p:spPr/>
+        <p:txBody>
+          <a:bodyPr/>
+          <a:lstStyle/>
+          <a:p>
+            <a:fld id="{F7021451-1387-4CA6-816F-3879F97B5CBC}" type="slidenum">
+              <a:rPr lang="en-US"/>
+              <a:t>9</a:t>
             </a:fld>
             <a:endParaRPr lang="en-US"/>
           </a:p>
@@ -6403,7 +6492,7 @@
                 <a:ea typeface="Calibri" pitchFamily="34" charset="-122"/>
                 <a:cs typeface="Calibri" pitchFamily="34" charset="-120"/>
               </a:rPr>
-              <a:t>两大核心能力：自然语言文件操作 · 安全Shell命令执行</a:t>
+              <a:t>6 个 LangChain 工具 · 自然语言驱动 · 自主决策执行</a:t>
             </a:r>
             <a:endParaRPr lang="en-US" sz="1200" dirty="0"/>
           </a:p>
@@ -6417,8 +6506,8 @@
         </p:nvSpPr>
         <p:spPr>
           <a:xfrm>
-            <a:off x="594360" y="1188720"/>
-            <a:ext cx="3840480" cy="3566160"/>
+            <a:off x="502920" y="1051560"/>
+            <a:ext cx="1261872" cy="1143000"/>
           </a:xfrm>
           <a:prstGeom prst="rect">
             <a:avLst/>
@@ -6444,14 +6533,14 @@
         </p:nvSpPr>
         <p:spPr>
           <a:xfrm>
-            <a:off x="594360" y="1188720"/>
-            <a:ext cx="3840480" cy="54864"/>
+            <a:off x="502920" y="1051560"/>
+            <a:ext cx="1261872" cy="36576"/>
           </a:xfrm>
           <a:prstGeom prst="rect">
             <a:avLst/>
           </a:prstGeom>
           <a:solidFill>
-            <a:srgbClr val="02C39A"/>
+            <a:srgbClr val="028090"/>
           </a:solidFill>
           <a:ln/>
         </p:spPr>
@@ -6464,8 +6553,8 @@
         </p:nvSpPr>
         <p:spPr>
           <a:xfrm>
-            <a:off x="868680" y="1371600"/>
-            <a:ext cx="3291840" cy="320040"/>
+            <a:off x="576072" y="1143000"/>
+            <a:ext cx="1115568" cy="320040"/>
           </a:xfrm>
           <a:prstGeom prst="rect">
             <a:avLst/>
@@ -6481,7 +6570,7 @@
               <a:buNone/>
             </a:pPr>
             <a:r>
-              <a:rPr lang="en-US" sz="1400" b="1" dirty="0">
+              <a:rPr lang="en-US" sz="1000" b="1" dirty="0">
                 <a:solidFill>
                   <a:srgbClr val="028090"/>
                 </a:solidFill>
@@ -6489,9 +6578,9 @@
                 <a:ea typeface="Calibri" pitchFamily="34" charset="-122"/>
                 <a:cs typeface="Calibri" pitchFamily="34" charset="-120"/>
               </a:rPr>
-              <a:t>功能一：自然语言文件操作</a:t>
-            </a:r>
-            <a:endParaRPr lang="en-US" sz="1400" dirty="0"/>
+              <a:t>📄  write_file</a:t>
+            </a:r>
+            <a:endParaRPr lang="en-US" sz="1000" dirty="0"/>
           </a:p>
         </p:txBody>
       </p:sp>
@@ -6503,8 +6592,8 @@
         </p:nvSpPr>
         <p:spPr>
           <a:xfrm>
-            <a:off x="868680" y="1783080"/>
-            <a:ext cx="3291840" cy="2743200"/>
+            <a:off x="576072" y="1508760"/>
+            <a:ext cx="1115568" cy="594360"/>
           </a:xfrm>
           <a:prstGeom prst="rect">
             <a:avLst/>
@@ -6517,13 +6606,10 @@
           <a:lstStyle/>
           <a:p>
             <a:pPr indent="0" marL="0">
-              <a:spcAft>
-                <a:spcPts val="800"/>
-              </a:spcAft>
-              <a:buNone/>
-            </a:pPr>
-            <a:r>
-              <a:rPr lang="en-US" sz="1000" dirty="0">
+              <a:buNone/>
+            </a:pPr>
+            <a:r>
+              <a:rPr lang="en-US" sz="800" dirty="0">
                 <a:solidFill>
                   <a:srgbClr val="64748B"/>
                 </a:solidFill>
@@ -6531,99 +6617,26 @@
                 <a:ea typeface="Calibri" pitchFamily="34" charset="-122"/>
                 <a:cs typeface="Calibri" pitchFamily="34" charset="-120"/>
               </a:rPr>
-              <a:t>用户输入自然语言 → Agent 自主调用工具</a:t>
-            </a:r>
-            <a:endParaRPr lang="en-US" sz="1000" dirty="0"/>
-          </a:p>
-          <a:p>
-            <a:pPr marL="342900" indent="-342900">
-              <a:buSzPct val="100000"/>
-              <a:buChar char="•"/>
-            </a:pPr>
-            <a:r>
-              <a:rPr lang="en-US" sz="1000" dirty="0">
-                <a:solidFill>
-                  <a:srgbClr val="1E293B"/>
-                </a:solidFill>
-                <a:latin typeface="Calibri" pitchFamily="34" charset="0"/>
-                <a:ea typeface="Calibri" pitchFamily="34" charset="-122"/>
-                <a:cs typeface="Calibri" pitchFamily="34" charset="-120"/>
-              </a:rPr>
-              <a:t>write_file — 创建/覆盖文件</a:t>
-            </a:r>
-            <a:endParaRPr lang="en-US" sz="1000" dirty="0"/>
-          </a:p>
-          <a:p>
-            <a:pPr marL="342900" indent="-342900">
-              <a:buSzPct val="100000"/>
-              <a:buChar char="•"/>
-            </a:pPr>
-            <a:r>
-              <a:rPr lang="en-US" sz="1000" dirty="0">
-                <a:solidFill>
-                  <a:srgbClr val="1E293B"/>
-                </a:solidFill>
-                <a:latin typeface="Calibri" pitchFamily="34" charset="0"/>
-                <a:ea typeface="Calibri" pitchFamily="34" charset="-122"/>
-                <a:cs typeface="Calibri" pitchFamily="34" charset="-120"/>
-              </a:rPr>
-              <a:t>read_file — 读取文件内容</a:t>
-            </a:r>
-            <a:endParaRPr lang="en-US" sz="1000" dirty="0"/>
-          </a:p>
-          <a:p>
-            <a:pPr marL="342900" indent="-342900">
-              <a:buSzPct val="100000"/>
-              <a:buChar char="•"/>
-            </a:pPr>
-            <a:r>
-              <a:rPr lang="en-US" sz="1000" dirty="0">
-                <a:solidFill>
-                  <a:srgbClr val="1E293B"/>
-                </a:solidFill>
-                <a:latin typeface="Calibri" pitchFamily="34" charset="0"/>
-                <a:ea typeface="Calibri" pitchFamily="34" charset="-122"/>
-                <a:cs typeface="Calibri" pitchFamily="34" charset="-120"/>
-              </a:rPr>
-              <a:t>list_files — 列出工作区文件</a:t>
-            </a:r>
-            <a:endParaRPr lang="en-US" sz="1000" dirty="0"/>
-          </a:p>
-          <a:p>
-            <a:pPr marL="342900" indent="-342900">
-              <a:buSzPct val="100000"/>
-              <a:buChar char="•"/>
-            </a:pPr>
-            <a:r>
-              <a:rPr lang="en-US" sz="1000" dirty="0">
-                <a:solidFill>
-                  <a:srgbClr val="1E293B"/>
-                </a:solidFill>
-                <a:latin typeface="Calibri" pitchFamily="34" charset="0"/>
-                <a:ea typeface="Calibri" pitchFamily="34" charset="-122"/>
-                <a:cs typeface="Calibri" pitchFamily="34" charset="-120"/>
-              </a:rPr>
-              <a:t>move_file — 移动/重命名文件</a:t>
-            </a:r>
-            <a:endParaRPr lang="en-US" sz="1000" dirty="0"/>
-          </a:p>
-          <a:p>
-            <a:pPr marL="342900" indent="-342900">
-              <a:buSzPct val="100000"/>
-              <a:buChar char="•"/>
-            </a:pPr>
-            <a:r>
-              <a:rPr lang="en-US" sz="1000" dirty="0">
-                <a:solidFill>
-                  <a:srgbClr val="1E293B"/>
-                </a:solidFill>
-                <a:latin typeface="Calibri" pitchFamily="34" charset="0"/>
-                <a:ea typeface="Calibri" pitchFamily="34" charset="-122"/>
-                <a:cs typeface="Calibri" pitchFamily="34" charset="-120"/>
-              </a:rPr>
-              <a:t>delete_file — 删除文件（含realpath边界检查）</a:t>
-            </a:r>
-            <a:endParaRPr lang="en-US" sz="1000" dirty="0"/>
+              <a:t>创建/覆盖文件</a:t>
+            </a:r>
+            <a:endParaRPr lang="en-US" sz="800" dirty="0"/>
+          </a:p>
+          <a:p>
+            <a:pPr indent="0" marL="0">
+              <a:buNone/>
+            </a:pPr>
+            <a:r>
+              <a:rPr lang="en-US" sz="800" dirty="0">
+                <a:solidFill>
+                  <a:srgbClr val="64748B"/>
+                </a:solidFill>
+                <a:latin typeface="Calibri" pitchFamily="34" charset="0"/>
+                <a:ea typeface="Calibri" pitchFamily="34" charset="-122"/>
+                <a:cs typeface="Calibri" pitchFamily="34" charset="-120"/>
+              </a:rPr>
+              <a:t>支持任意路径写入</a:t>
+            </a:r>
+            <a:endParaRPr lang="en-US" sz="800" dirty="0"/>
           </a:p>
         </p:txBody>
       </p:sp>
@@ -6635,8 +6648,8 @@
         </p:nvSpPr>
         <p:spPr>
           <a:xfrm>
-            <a:off x="4709160" y="1188720"/>
-            <a:ext cx="3840480" cy="3566160"/>
+            <a:off x="1856232" y="1051560"/>
+            <a:ext cx="1261872" cy="1143000"/>
           </a:xfrm>
           <a:prstGeom prst="rect">
             <a:avLst/>
@@ -6662,8 +6675,150 @@
         </p:nvSpPr>
         <p:spPr>
           <a:xfrm>
-            <a:off x="4709160" y="1188720"/>
-            <a:ext cx="3840480" cy="54864"/>
+            <a:off x="1856232" y="1051560"/>
+            <a:ext cx="1261872" cy="36576"/>
+          </a:xfrm>
+          <a:prstGeom prst="rect">
+            <a:avLst/>
+          </a:prstGeom>
+          <a:solidFill>
+            <a:srgbClr val="00A896"/>
+          </a:solidFill>
+          <a:ln/>
+        </p:spPr>
+      </p:sp>
+      <p:sp>
+        <p:nvSpPr>
+          <p:cNvPr id="12" name="Text 10"/>
+          <p:cNvSpPr/>
+          <p:nvPr/>
+        </p:nvSpPr>
+        <p:spPr>
+          <a:xfrm>
+            <a:off x="1929384" y="1143000"/>
+            <a:ext cx="1115568" cy="320040"/>
+          </a:xfrm>
+          <a:prstGeom prst="rect">
+            <a:avLst/>
+          </a:prstGeom>
+          <a:noFill/>
+          <a:ln/>
+        </p:spPr>
+        <p:txBody>
+          <a:bodyPr wrap="square" lIns="0" tIns="0" rIns="0" bIns="0" rtlCol="0" anchor="ctr"/>
+          <a:lstStyle/>
+          <a:p>
+            <a:pPr indent="0" marL="0">
+              <a:buNone/>
+            </a:pPr>
+            <a:r>
+              <a:rPr lang="en-US" sz="1000" b="1" dirty="0">
+                <a:solidFill>
+                  <a:srgbClr val="00A896"/>
+                </a:solidFill>
+                <a:latin typeface="Calibri" pitchFamily="34" charset="0"/>
+                <a:ea typeface="Calibri" pitchFamily="34" charset="-122"/>
+                <a:cs typeface="Calibri" pitchFamily="34" charset="-120"/>
+              </a:rPr>
+              <a:t>📖  read_file</a:t>
+            </a:r>
+            <a:endParaRPr lang="en-US" sz="1000" dirty="0"/>
+          </a:p>
+        </p:txBody>
+      </p:sp>
+      <p:sp>
+        <p:nvSpPr>
+          <p:cNvPr id="13" name="Text 11"/>
+          <p:cNvSpPr/>
+          <p:nvPr/>
+        </p:nvSpPr>
+        <p:spPr>
+          <a:xfrm>
+            <a:off x="1929384" y="1508760"/>
+            <a:ext cx="1115568" cy="594360"/>
+          </a:xfrm>
+          <a:prstGeom prst="rect">
+            <a:avLst/>
+          </a:prstGeom>
+          <a:noFill/>
+          <a:ln/>
+        </p:spPr>
+        <p:txBody>
+          <a:bodyPr wrap="square" rtlCol="0" anchor="ctr"/>
+          <a:lstStyle/>
+          <a:p>
+            <a:pPr indent="0" marL="0">
+              <a:buNone/>
+            </a:pPr>
+            <a:r>
+              <a:rPr lang="en-US" sz="800" dirty="0">
+                <a:solidFill>
+                  <a:srgbClr val="64748B"/>
+                </a:solidFill>
+                <a:latin typeface="Calibri" pitchFamily="34" charset="0"/>
+                <a:ea typeface="Calibri" pitchFamily="34" charset="-122"/>
+                <a:cs typeface="Calibri" pitchFamily="34" charset="-120"/>
+              </a:rPr>
+              <a:t>读取文件内容</a:t>
+            </a:r>
+            <a:endParaRPr lang="en-US" sz="800" dirty="0"/>
+          </a:p>
+          <a:p>
+            <a:pPr indent="0" marL="0">
+              <a:buNone/>
+            </a:pPr>
+            <a:r>
+              <a:rPr lang="en-US" sz="800" dirty="0">
+                <a:solidFill>
+                  <a:srgbClr val="64748B"/>
+                </a:solidFill>
+                <a:latin typeface="Calibri" pitchFamily="34" charset="0"/>
+                <a:ea typeface="Calibri" pitchFamily="34" charset="-122"/>
+                <a:cs typeface="Calibri" pitchFamily="34" charset="-120"/>
+              </a:rPr>
+              <a:t>敏感路径告警但不拦截</a:t>
+            </a:r>
+            <a:endParaRPr lang="en-US" sz="800" dirty="0"/>
+          </a:p>
+        </p:txBody>
+      </p:sp>
+      <p:sp>
+        <p:nvSpPr>
+          <p:cNvPr id="14" name="Shape 12"/>
+          <p:cNvSpPr/>
+          <p:nvPr/>
+        </p:nvSpPr>
+        <p:spPr>
+          <a:xfrm>
+            <a:off x="3209544" y="1051560"/>
+            <a:ext cx="1261872" cy="1143000"/>
+          </a:xfrm>
+          <a:prstGeom prst="rect">
+            <a:avLst/>
+          </a:prstGeom>
+          <a:solidFill>
+            <a:srgbClr val="FFFFFF"/>
+          </a:solidFill>
+          <a:ln/>
+          <a:effectLst>
+            <a:outerShdw sx="100000" sy="100000" kx="0" ky="0" algn="bl" rotWithShape="0" blurRad="50800" dist="25400" dir="8100000">
+              <a:srgbClr val="000000">
+                <a:alpha val="8000"/>
+              </a:srgbClr>
+            </a:outerShdw>
+          </a:effectLst>
+        </p:spPr>
+      </p:sp>
+      <p:sp>
+        <p:nvSpPr>
+          <p:cNvPr id="15" name="Shape 13"/>
+          <p:cNvSpPr/>
+          <p:nvPr/>
+        </p:nvSpPr>
+        <p:spPr>
+          <a:xfrm>
+            <a:off x="3209544" y="1051560"/>
+            <a:ext cx="1261872" cy="36576"/>
           </a:xfrm>
           <a:prstGeom prst="rect">
             <a:avLst/>
@@ -6676,14 +6831,14 @@
       </p:sp>
       <p:sp>
         <p:nvSpPr>
-          <p:cNvPr id="12" name="Text 10"/>
-          <p:cNvSpPr/>
-          <p:nvPr/>
-        </p:nvSpPr>
-        <p:spPr>
-          <a:xfrm>
-            <a:off x="4983480" y="1371600"/>
-            <a:ext cx="3291840" cy="320040"/>
+          <p:cNvPr id="16" name="Text 14"/>
+          <p:cNvSpPr/>
+          <p:nvPr/>
+        </p:nvSpPr>
+        <p:spPr>
+          <a:xfrm>
+            <a:off x="3282696" y="1143000"/>
+            <a:ext cx="1115568" cy="320040"/>
           </a:xfrm>
           <a:prstGeom prst="rect">
             <a:avLst/>
@@ -6699,7 +6854,555 @@
               <a:buNone/>
             </a:pPr>
             <a:r>
-              <a:rPr lang="en-US" sz="1400" b="1" dirty="0">
+              <a:rPr lang="en-US" sz="1000" b="1" dirty="0">
+                <a:solidFill>
+                  <a:srgbClr val="02C39A"/>
+                </a:solidFill>
+                <a:latin typeface="Calibri" pitchFamily="34" charset="0"/>
+                <a:ea typeface="Calibri" pitchFamily="34" charset="-122"/>
+                <a:cs typeface="Calibri" pitchFamily="34" charset="-120"/>
+              </a:rPr>
+              <a:t>📂  list_files</a:t>
+            </a:r>
+            <a:endParaRPr lang="en-US" sz="1000" dirty="0"/>
+          </a:p>
+        </p:txBody>
+      </p:sp>
+      <p:sp>
+        <p:nvSpPr>
+          <p:cNvPr id="17" name="Text 15"/>
+          <p:cNvSpPr/>
+          <p:nvPr/>
+        </p:nvSpPr>
+        <p:spPr>
+          <a:xfrm>
+            <a:off x="3282696" y="1508760"/>
+            <a:ext cx="1115568" cy="594360"/>
+          </a:xfrm>
+          <a:prstGeom prst="rect">
+            <a:avLst/>
+          </a:prstGeom>
+          <a:noFill/>
+          <a:ln/>
+        </p:spPr>
+        <p:txBody>
+          <a:bodyPr wrap="square" rtlCol="0" anchor="ctr"/>
+          <a:lstStyle/>
+          <a:p>
+            <a:pPr indent="0" marL="0">
+              <a:buNone/>
+            </a:pPr>
+            <a:r>
+              <a:rPr lang="en-US" sz="800" dirty="0">
+                <a:solidFill>
+                  <a:srgbClr val="64748B"/>
+                </a:solidFill>
+                <a:latin typeface="Calibri" pitchFamily="34" charset="0"/>
+                <a:ea typeface="Calibri" pitchFamily="34" charset="-122"/>
+                <a:cs typeface="Calibri" pitchFamily="34" charset="-120"/>
+              </a:rPr>
+              <a:t>列出工作区文件</a:t>
+            </a:r>
+            <a:endParaRPr lang="en-US" sz="800" dirty="0"/>
+          </a:p>
+          <a:p>
+            <a:pPr indent="0" marL="0">
+              <a:buNone/>
+            </a:pPr>
+            <a:r>
+              <a:rPr lang="en-US" sz="800" dirty="0">
+                <a:solidFill>
+                  <a:srgbClr val="64748B"/>
+                </a:solidFill>
+                <a:latin typeface="Calibri" pitchFamily="34" charset="0"/>
+                <a:ea typeface="Calibri" pitchFamily="34" charset="-122"/>
+                <a:cs typeface="Calibri" pitchFamily="34" charset="-120"/>
+              </a:rPr>
+              <a:t>查看目录结构</a:t>
+            </a:r>
+            <a:endParaRPr lang="en-US" sz="800" dirty="0"/>
+          </a:p>
+        </p:txBody>
+      </p:sp>
+      <p:sp>
+        <p:nvSpPr>
+          <p:cNvPr id="18" name="Shape 16"/>
+          <p:cNvSpPr/>
+          <p:nvPr/>
+        </p:nvSpPr>
+        <p:spPr>
+          <a:xfrm>
+            <a:off x="502920" y="2286000"/>
+            <a:ext cx="1261872" cy="1143000"/>
+          </a:xfrm>
+          <a:prstGeom prst="rect">
+            <a:avLst/>
+          </a:prstGeom>
+          <a:solidFill>
+            <a:srgbClr val="FFFFFF"/>
+          </a:solidFill>
+          <a:ln/>
+          <a:effectLst>
+            <a:outerShdw sx="100000" sy="100000" kx="0" ky="0" algn="bl" rotWithShape="0" blurRad="50800" dist="25400" dir="8100000">
+              <a:srgbClr val="000000">
+                <a:alpha val="8000"/>
+              </a:srgbClr>
+            </a:outerShdw>
+          </a:effectLst>
+        </p:spPr>
+      </p:sp>
+      <p:sp>
+        <p:nvSpPr>
+          <p:cNvPr id="19" name="Shape 17"/>
+          <p:cNvSpPr/>
+          <p:nvPr/>
+        </p:nvSpPr>
+        <p:spPr>
+          <a:xfrm>
+            <a:off x="502920" y="2286000"/>
+            <a:ext cx="1261872" cy="36576"/>
+          </a:xfrm>
+          <a:prstGeom prst="rect">
+            <a:avLst/>
+          </a:prstGeom>
+          <a:solidFill>
+            <a:srgbClr val="0D9488"/>
+          </a:solidFill>
+          <a:ln/>
+        </p:spPr>
+      </p:sp>
+      <p:sp>
+        <p:nvSpPr>
+          <p:cNvPr id="20" name="Text 18"/>
+          <p:cNvSpPr/>
+          <p:nvPr/>
+        </p:nvSpPr>
+        <p:spPr>
+          <a:xfrm>
+            <a:off x="576072" y="2377440"/>
+            <a:ext cx="1115568" cy="320040"/>
+          </a:xfrm>
+          <a:prstGeom prst="rect">
+            <a:avLst/>
+          </a:prstGeom>
+          <a:noFill/>
+          <a:ln/>
+        </p:spPr>
+        <p:txBody>
+          <a:bodyPr wrap="square" lIns="0" tIns="0" rIns="0" bIns="0" rtlCol="0" anchor="ctr"/>
+          <a:lstStyle/>
+          <a:p>
+            <a:pPr indent="0" marL="0">
+              <a:buNone/>
+            </a:pPr>
+            <a:r>
+              <a:rPr lang="en-US" sz="1000" b="1" dirty="0">
+                <a:solidFill>
+                  <a:srgbClr val="0D9488"/>
+                </a:solidFill>
+                <a:latin typeface="Calibri" pitchFamily="34" charset="0"/>
+                <a:ea typeface="Calibri" pitchFamily="34" charset="-122"/>
+                <a:cs typeface="Calibri" pitchFamily="34" charset="-120"/>
+              </a:rPr>
+              <a:t>🔄  move_file</a:t>
+            </a:r>
+            <a:endParaRPr lang="en-US" sz="1000" dirty="0"/>
+          </a:p>
+        </p:txBody>
+      </p:sp>
+      <p:sp>
+        <p:nvSpPr>
+          <p:cNvPr id="21" name="Text 19"/>
+          <p:cNvSpPr/>
+          <p:nvPr/>
+        </p:nvSpPr>
+        <p:spPr>
+          <a:xfrm>
+            <a:off x="576072" y="2743200"/>
+            <a:ext cx="1115568" cy="594360"/>
+          </a:xfrm>
+          <a:prstGeom prst="rect">
+            <a:avLst/>
+          </a:prstGeom>
+          <a:noFill/>
+          <a:ln/>
+        </p:spPr>
+        <p:txBody>
+          <a:bodyPr wrap="square" rtlCol="0" anchor="ctr"/>
+          <a:lstStyle/>
+          <a:p>
+            <a:pPr indent="0" marL="0">
+              <a:buNone/>
+            </a:pPr>
+            <a:r>
+              <a:rPr lang="en-US" sz="800" dirty="0">
+                <a:solidFill>
+                  <a:srgbClr val="64748B"/>
+                </a:solidFill>
+                <a:latin typeface="Calibri" pitchFamily="34" charset="0"/>
+                <a:ea typeface="Calibri" pitchFamily="34" charset="-122"/>
+                <a:cs typeface="Calibri" pitchFamily="34" charset="-120"/>
+              </a:rPr>
+              <a:t>移动/重命名文件</a:t>
+            </a:r>
+            <a:endParaRPr lang="en-US" sz="800" dirty="0"/>
+          </a:p>
+          <a:p>
+            <a:pPr indent="0" marL="0">
+              <a:buNone/>
+            </a:pPr>
+            <a:r>
+              <a:rPr lang="en-US" sz="800" dirty="0">
+                <a:solidFill>
+                  <a:srgbClr val="64748B"/>
+                </a:solidFill>
+                <a:latin typeface="Calibri" pitchFamily="34" charset="0"/>
+                <a:ea typeface="Calibri" pitchFamily="34" charset="-122"/>
+                <a:cs typeface="Calibri" pitchFamily="34" charset="-120"/>
+              </a:rPr>
+              <a:t>跨目录整理</a:t>
+            </a:r>
+            <a:endParaRPr lang="en-US" sz="800" dirty="0"/>
+          </a:p>
+        </p:txBody>
+      </p:sp>
+      <p:sp>
+        <p:nvSpPr>
+          <p:cNvPr id="22" name="Shape 20"/>
+          <p:cNvSpPr/>
+          <p:nvPr/>
+        </p:nvSpPr>
+        <p:spPr>
+          <a:xfrm>
+            <a:off x="1856232" y="2286000"/>
+            <a:ext cx="1261872" cy="1143000"/>
+          </a:xfrm>
+          <a:prstGeom prst="rect">
+            <a:avLst/>
+          </a:prstGeom>
+          <a:solidFill>
+            <a:srgbClr val="FFFFFF"/>
+          </a:solidFill>
+          <a:ln/>
+          <a:effectLst>
+            <a:outerShdw sx="100000" sy="100000" kx="0" ky="0" algn="bl" rotWithShape="0" blurRad="50800" dist="25400" dir="8100000">
+              <a:srgbClr val="000000">
+                <a:alpha val="8000"/>
+              </a:srgbClr>
+            </a:outerShdw>
+          </a:effectLst>
+        </p:spPr>
+      </p:sp>
+      <p:sp>
+        <p:nvSpPr>
+          <p:cNvPr id="23" name="Shape 21"/>
+          <p:cNvSpPr/>
+          <p:nvPr/>
+        </p:nvSpPr>
+        <p:spPr>
+          <a:xfrm>
+            <a:off x="1856232" y="2286000"/>
+            <a:ext cx="1261872" cy="36576"/>
+          </a:xfrm>
+          <a:prstGeom prst="rect">
+            <a:avLst/>
+          </a:prstGeom>
+          <a:solidFill>
+            <a:srgbClr val="0F766E"/>
+          </a:solidFill>
+          <a:ln/>
+        </p:spPr>
+      </p:sp>
+      <p:sp>
+        <p:nvSpPr>
+          <p:cNvPr id="24" name="Text 22"/>
+          <p:cNvSpPr/>
+          <p:nvPr/>
+        </p:nvSpPr>
+        <p:spPr>
+          <a:xfrm>
+            <a:off x="1929384" y="2377440"/>
+            <a:ext cx="1115568" cy="320040"/>
+          </a:xfrm>
+          <a:prstGeom prst="rect">
+            <a:avLst/>
+          </a:prstGeom>
+          <a:noFill/>
+          <a:ln/>
+        </p:spPr>
+        <p:txBody>
+          <a:bodyPr wrap="square" lIns="0" tIns="0" rIns="0" bIns="0" rtlCol="0" anchor="ctr"/>
+          <a:lstStyle/>
+          <a:p>
+            <a:pPr indent="0" marL="0">
+              <a:buNone/>
+            </a:pPr>
+            <a:r>
+              <a:rPr lang="en-US" sz="1000" b="1" dirty="0">
+                <a:solidFill>
+                  <a:srgbClr val="0F766E"/>
+                </a:solidFill>
+                <a:latin typeface="Calibri" pitchFamily="34" charset="0"/>
+                <a:ea typeface="Calibri" pitchFamily="34" charset="-122"/>
+                <a:cs typeface="Calibri" pitchFamily="34" charset="-120"/>
+              </a:rPr>
+              <a:t>🗑️  delete_file</a:t>
+            </a:r>
+            <a:endParaRPr lang="en-US" sz="1000" dirty="0"/>
+          </a:p>
+        </p:txBody>
+      </p:sp>
+      <p:sp>
+        <p:nvSpPr>
+          <p:cNvPr id="25" name="Text 23"/>
+          <p:cNvSpPr/>
+          <p:nvPr/>
+        </p:nvSpPr>
+        <p:spPr>
+          <a:xfrm>
+            <a:off x="1929384" y="2743200"/>
+            <a:ext cx="1115568" cy="594360"/>
+          </a:xfrm>
+          <a:prstGeom prst="rect">
+            <a:avLst/>
+          </a:prstGeom>
+          <a:noFill/>
+          <a:ln/>
+        </p:spPr>
+        <p:txBody>
+          <a:bodyPr wrap="square" rtlCol="0" anchor="ctr"/>
+          <a:lstStyle/>
+          <a:p>
+            <a:pPr indent="0" marL="0">
+              <a:buNone/>
+            </a:pPr>
+            <a:r>
+              <a:rPr lang="en-US" sz="800" dirty="0">
+                <a:solidFill>
+                  <a:srgbClr val="64748B"/>
+                </a:solidFill>
+                <a:latin typeface="Calibri" pitchFamily="34" charset="0"/>
+                <a:ea typeface="Calibri" pitchFamily="34" charset="-122"/>
+                <a:cs typeface="Calibri" pitchFamily="34" charset="-120"/>
+              </a:rPr>
+              <a:t>删除指定文件</a:t>
+            </a:r>
+            <a:endParaRPr lang="en-US" sz="800" dirty="0"/>
+          </a:p>
+          <a:p>
+            <a:pPr indent="0" marL="0">
+              <a:buNone/>
+            </a:pPr>
+            <a:r>
+              <a:rPr lang="en-US" sz="800" dirty="0">
+                <a:solidFill>
+                  <a:srgbClr val="64748B"/>
+                </a:solidFill>
+                <a:latin typeface="Calibri" pitchFamily="34" charset="0"/>
+                <a:ea typeface="Calibri" pitchFamily="34" charset="-122"/>
+                <a:cs typeface="Calibri" pitchFamily="34" charset="-120"/>
+              </a:rPr>
+              <a:t>关键路径保护</a:t>
+            </a:r>
+            <a:endParaRPr lang="en-US" sz="800" dirty="0"/>
+          </a:p>
+        </p:txBody>
+      </p:sp>
+      <p:sp>
+        <p:nvSpPr>
+          <p:cNvPr id="26" name="Shape 24"/>
+          <p:cNvSpPr/>
+          <p:nvPr/>
+        </p:nvSpPr>
+        <p:spPr>
+          <a:xfrm>
+            <a:off x="3209544" y="2286000"/>
+            <a:ext cx="1261872" cy="1143000"/>
+          </a:xfrm>
+          <a:prstGeom prst="rect">
+            <a:avLst/>
+          </a:prstGeom>
+          <a:solidFill>
+            <a:srgbClr val="FFFFFF"/>
+          </a:solidFill>
+          <a:ln/>
+          <a:effectLst>
+            <a:outerShdw sx="100000" sy="100000" kx="0" ky="0" algn="bl" rotWithShape="0" blurRad="50800" dist="25400" dir="8100000">
+              <a:srgbClr val="000000">
+                <a:alpha val="8000"/>
+              </a:srgbClr>
+            </a:outerShdw>
+          </a:effectLst>
+        </p:spPr>
+      </p:sp>
+      <p:sp>
+        <p:nvSpPr>
+          <p:cNvPr id="27" name="Shape 25"/>
+          <p:cNvSpPr/>
+          <p:nvPr/>
+        </p:nvSpPr>
+        <p:spPr>
+          <a:xfrm>
+            <a:off x="3209544" y="2286000"/>
+            <a:ext cx="1261872" cy="36576"/>
+          </a:xfrm>
+          <a:prstGeom prst="rect">
+            <a:avLst/>
+          </a:prstGeom>
+          <a:solidFill>
+            <a:srgbClr val="115E59"/>
+          </a:solidFill>
+          <a:ln/>
+        </p:spPr>
+      </p:sp>
+      <p:sp>
+        <p:nvSpPr>
+          <p:cNvPr id="28" name="Text 26"/>
+          <p:cNvSpPr/>
+          <p:nvPr/>
+        </p:nvSpPr>
+        <p:spPr>
+          <a:xfrm>
+            <a:off x="3282696" y="2377440"/>
+            <a:ext cx="1115568" cy="320040"/>
+          </a:xfrm>
+          <a:prstGeom prst="rect">
+            <a:avLst/>
+          </a:prstGeom>
+          <a:noFill/>
+          <a:ln/>
+        </p:spPr>
+        <p:txBody>
+          <a:bodyPr wrap="square" lIns="0" tIns="0" rIns="0" bIns="0" rtlCol="0" anchor="ctr"/>
+          <a:lstStyle/>
+          <a:p>
+            <a:pPr indent="0" marL="0">
+              <a:buNone/>
+            </a:pPr>
+            <a:r>
+              <a:rPr lang="en-US" sz="1000" b="1" dirty="0">
+                <a:solidFill>
+                  <a:srgbClr val="115E59"/>
+                </a:solidFill>
+                <a:latin typeface="Calibri" pitchFamily="34" charset="0"/>
+                <a:ea typeface="Calibri" pitchFamily="34" charset="-122"/>
+                <a:cs typeface="Calibri" pitchFamily="34" charset="-120"/>
+              </a:rPr>
+              <a:t>⚡  execute_shell</a:t>
+            </a:r>
+            <a:endParaRPr lang="en-US" sz="1000" dirty="0"/>
+          </a:p>
+        </p:txBody>
+      </p:sp>
+      <p:sp>
+        <p:nvSpPr>
+          <p:cNvPr id="29" name="Text 27"/>
+          <p:cNvSpPr/>
+          <p:nvPr/>
+        </p:nvSpPr>
+        <p:spPr>
+          <a:xfrm>
+            <a:off x="3282696" y="2743200"/>
+            <a:ext cx="1115568" cy="594360"/>
+          </a:xfrm>
+          <a:prstGeom prst="rect">
+            <a:avLst/>
+          </a:prstGeom>
+          <a:noFill/>
+          <a:ln/>
+        </p:spPr>
+        <p:txBody>
+          <a:bodyPr wrap="square" rtlCol="0" anchor="ctr"/>
+          <a:lstStyle/>
+          <a:p>
+            <a:pPr indent="0" marL="0">
+              <a:buNone/>
+            </a:pPr>
+            <a:r>
+              <a:rPr lang="en-US" sz="800" dirty="0">
+                <a:solidFill>
+                  <a:srgbClr val="64748B"/>
+                </a:solidFill>
+                <a:latin typeface="Calibri" pitchFamily="34" charset="0"/>
+                <a:ea typeface="Calibri" pitchFamily="34" charset="-122"/>
+                <a:cs typeface="Calibri" pitchFamily="34" charset="-120"/>
+              </a:rPr>
+              <a:t>执行 Shell 命令</a:t>
+            </a:r>
+            <a:endParaRPr lang="en-US" sz="800" dirty="0"/>
+          </a:p>
+          <a:p>
+            <a:pPr indent="0" marL="0">
+              <a:buNone/>
+            </a:pPr>
+            <a:r>
+              <a:rPr lang="en-US" sz="800" dirty="0">
+                <a:solidFill>
+                  <a:srgbClr val="64748B"/>
+                </a:solidFill>
+                <a:latin typeface="Calibri" pitchFamily="34" charset="0"/>
+                <a:ea typeface="Calibri" pitchFamily="34" charset="-122"/>
+                <a:cs typeface="Calibri" pitchFamily="34" charset="-120"/>
+              </a:rPr>
+              <a:t>20+ 规则安全检查</a:t>
+            </a:r>
+            <a:endParaRPr lang="en-US" sz="800" dirty="0"/>
+          </a:p>
+        </p:txBody>
+      </p:sp>
+      <p:sp>
+        <p:nvSpPr>
+          <p:cNvPr id="30" name="Shape 28"/>
+          <p:cNvSpPr/>
+          <p:nvPr/>
+        </p:nvSpPr>
+        <p:spPr>
+          <a:xfrm>
+            <a:off x="4617720" y="1051560"/>
+            <a:ext cx="4069080" cy="2423160"/>
+          </a:xfrm>
+          <a:prstGeom prst="rect">
+            <a:avLst/>
+          </a:prstGeom>
+          <a:solidFill>
+            <a:srgbClr val="F1F5F9"/>
+          </a:solidFill>
+          <a:ln/>
+          <a:effectLst>
+            <a:outerShdw sx="100000" sy="100000" kx="0" ky="0" algn="bl" rotWithShape="0" blurRad="50800" dist="25400" dir="8100000">
+              <a:srgbClr val="000000">
+                <a:alpha val="8000"/>
+              </a:srgbClr>
+            </a:outerShdw>
+          </a:effectLst>
+        </p:spPr>
+      </p:sp>
+      <p:sp>
+        <p:nvSpPr>
+          <p:cNvPr id="31" name="Text 29"/>
+          <p:cNvSpPr/>
+          <p:nvPr/>
+        </p:nvSpPr>
+        <p:spPr>
+          <a:xfrm>
+            <a:off x="4892040" y="1115568"/>
+            <a:ext cx="3474720" cy="274320"/>
+          </a:xfrm>
+          <a:prstGeom prst="rect">
+            <a:avLst/>
+          </a:prstGeom>
+          <a:noFill/>
+          <a:ln/>
+        </p:spPr>
+        <p:txBody>
+          <a:bodyPr wrap="square" lIns="0" tIns="0" rIns="0" bIns="0" rtlCol="0" anchor="ctr"/>
+          <a:lstStyle/>
+          <a:p>
+            <a:pPr indent="0" marL="0">
+              <a:buNone/>
+            </a:pPr>
+            <a:r>
+              <a:rPr lang="en-US" sz="1300" b="1" dirty="0">
                 <a:solidFill>
                   <a:srgbClr val="028090"/>
                 </a:solidFill>
@@ -6707,22 +7410,22 @@
                 <a:ea typeface="Calibri" pitchFamily="34" charset="-122"/>
                 <a:cs typeface="Calibri" pitchFamily="34" charset="-120"/>
               </a:rPr>
-              <a:t>功能二：安全Shell命令执行</a:t>
-            </a:r>
-            <a:endParaRPr lang="en-US" sz="1400" dirty="0"/>
-          </a:p>
-        </p:txBody>
-      </p:sp>
-      <p:sp>
-        <p:nvSpPr>
-          <p:cNvPr id="13" name="Text 11"/>
-          <p:cNvSpPr/>
-          <p:nvPr/>
-        </p:nvSpPr>
-        <p:spPr>
-          <a:xfrm>
-            <a:off x="4983480" y="1783080"/>
-            <a:ext cx="3291840" cy="2743200"/>
+              <a:t>典型使用场景</a:t>
+            </a:r>
+            <a:endParaRPr lang="en-US" sz="1300" dirty="0"/>
+          </a:p>
+        </p:txBody>
+      </p:sp>
+      <p:sp>
+        <p:nvSpPr>
+          <p:cNvPr id="32" name="Text 30"/>
+          <p:cNvSpPr/>
+          <p:nvPr/>
+        </p:nvSpPr>
+        <p:spPr>
+          <a:xfrm>
+            <a:off x="4892040" y="1463040"/>
+            <a:ext cx="3474720" cy="137160"/>
           </a:xfrm>
           <a:prstGeom prst="rect">
             <a:avLst/>
@@ -6731,17 +7434,536 @@
           <a:ln/>
         </p:spPr>
         <p:txBody>
+          <a:bodyPr wrap="square" lIns="0" tIns="0" rIns="0" bIns="0" rtlCol="0" anchor="ctr"/>
+          <a:lstStyle/>
+          <a:p>
+            <a:pPr indent="0" marL="0">
+              <a:buNone/>
+            </a:pPr>
+            <a:r>
+              <a:rPr lang="en-US" sz="700" b="1" dirty="0">
+                <a:solidFill>
+                  <a:srgbClr val="D97706"/>
+                </a:solidFill>
+                <a:latin typeface="Calibri" pitchFamily="34" charset="0"/>
+                <a:ea typeface="Calibri" pitchFamily="34" charset="-122"/>
+                <a:cs typeface="Calibri" pitchFamily="34" charset="-120"/>
+              </a:rPr>
+              <a:t>🗣️ 用户输入</a:t>
+            </a:r>
+            <a:endParaRPr lang="en-US" sz="700" dirty="0"/>
+          </a:p>
+        </p:txBody>
+      </p:sp>
+      <p:sp>
+        <p:nvSpPr>
+          <p:cNvPr id="33" name="Text 31"/>
+          <p:cNvSpPr/>
+          <p:nvPr/>
+        </p:nvSpPr>
+        <p:spPr>
+          <a:xfrm>
+            <a:off x="4892040" y="1600200"/>
+            <a:ext cx="3474720" cy="320040"/>
+          </a:xfrm>
+          <a:prstGeom prst="rect">
+            <a:avLst/>
+          </a:prstGeom>
+          <a:noFill/>
+          <a:ln/>
+        </p:spPr>
+        <p:txBody>
+          <a:bodyPr wrap="square" lIns="0" tIns="0" rIns="0" bIns="0" rtlCol="0" anchor="ctr"/>
+          <a:lstStyle/>
+          <a:p>
+            <a:pPr indent="0" marL="0">
+              <a:buNone/>
+            </a:pPr>
+            <a:r>
+              <a:rPr lang="en-US" sz="750" dirty="0">
+                <a:solidFill>
+                  <a:srgbClr val="1E293B"/>
+                </a:solidFill>
+                <a:latin typeface="Calibri" pitchFamily="34" charset="0"/>
+                <a:ea typeface="Calibri" pitchFamily="34" charset="-122"/>
+                <a:cs typeface="Calibri" pitchFamily="34" charset="-120"/>
+              </a:rPr>
+              <a:t>帮我在 /home/yg 下创建一个 hello.py 写入打印Hello的代码并执行它</a:t>
+            </a:r>
+            <a:endParaRPr lang="en-US" sz="750" dirty="0"/>
+          </a:p>
+        </p:txBody>
+      </p:sp>
+      <p:sp>
+        <p:nvSpPr>
+          <p:cNvPr id="34" name="Text 32"/>
+          <p:cNvSpPr/>
+          <p:nvPr/>
+        </p:nvSpPr>
+        <p:spPr>
+          <a:xfrm>
+            <a:off x="4892040" y="1938528"/>
+            <a:ext cx="3474720" cy="137160"/>
+          </a:xfrm>
+          <a:prstGeom prst="rect">
+            <a:avLst/>
+          </a:prstGeom>
+          <a:noFill/>
+          <a:ln/>
+        </p:spPr>
+        <p:txBody>
+          <a:bodyPr wrap="square" lIns="0" tIns="0" rIns="0" bIns="0" rtlCol="0" anchor="ctr"/>
+          <a:lstStyle/>
+          <a:p>
+            <a:pPr indent="0" marL="0">
+              <a:buNone/>
+            </a:pPr>
+            <a:r>
+              <a:rPr lang="en-US" sz="700" b="1" dirty="0">
+                <a:solidFill>
+                  <a:srgbClr val="059669"/>
+                </a:solidFill>
+                <a:latin typeface="Calibri" pitchFamily="34" charset="0"/>
+                <a:ea typeface="Calibri" pitchFamily="34" charset="-122"/>
+                <a:cs typeface="Calibri" pitchFamily="34" charset="-120"/>
+              </a:rPr>
+              <a:t>🤖 Agent 执行</a:t>
+            </a:r>
+            <a:endParaRPr lang="en-US" sz="700" dirty="0"/>
+          </a:p>
+        </p:txBody>
+      </p:sp>
+      <p:sp>
+        <p:nvSpPr>
+          <p:cNvPr id="35" name="Text 33"/>
+          <p:cNvSpPr/>
+          <p:nvPr/>
+        </p:nvSpPr>
+        <p:spPr>
+          <a:xfrm>
+            <a:off x="4892040" y="2075688"/>
+            <a:ext cx="3474720" cy="320040"/>
+          </a:xfrm>
+          <a:prstGeom prst="rect">
+            <a:avLst/>
+          </a:prstGeom>
+          <a:noFill/>
+          <a:ln/>
+        </p:spPr>
+        <p:txBody>
+          <a:bodyPr wrap="square" lIns="0" tIns="0" rIns="0" bIns="0" rtlCol="0" anchor="ctr"/>
+          <a:lstStyle/>
+          <a:p>
+            <a:pPr indent="0" marL="0">
+              <a:buNone/>
+            </a:pPr>
+            <a:r>
+              <a:rPr lang="en-US" sz="750" dirty="0">
+                <a:solidFill>
+                  <a:srgbClr val="64748B"/>
+                </a:solidFill>
+                <a:latin typeface="Calibri" pitchFamily="34" charset="0"/>
+                <a:ea typeface="Calibri" pitchFamily="34" charset="-122"/>
+                <a:cs typeface="Calibri" pitchFamily="34" charset="-120"/>
+              </a:rPr>
+              <a:t>✅ 调用 write_file → 写入代码</a:t>
+            </a:r>
+            <a:endParaRPr lang="en-US" sz="750" dirty="0"/>
+          </a:p>
+          <a:p>
+            <a:pPr indent="0" marL="0">
+              <a:buNone/>
+            </a:pPr>
+            <a:r>
+              <a:rPr lang="en-US" sz="750" dirty="0">
+                <a:solidFill>
+                  <a:srgbClr val="64748B"/>
+                </a:solidFill>
+                <a:latin typeface="Calibri" pitchFamily="34" charset="0"/>
+                <a:ea typeface="Calibri" pitchFamily="34" charset="-122"/>
+                <a:cs typeface="Calibri" pitchFamily="34" charset="-120"/>
+              </a:rPr>
+              <a:t>✅ 调用 execute_shell → 运行脚本</a:t>
+            </a:r>
+            <a:endParaRPr lang="en-US" sz="750" dirty="0"/>
+          </a:p>
+          <a:p>
+            <a:pPr indent="0" marL="0">
+              <a:buNone/>
+            </a:pPr>
+            <a:r>
+              <a:rPr lang="en-US" sz="750" dirty="0">
+                <a:solidFill>
+                  <a:srgbClr val="64748B"/>
+                </a:solidFill>
+                <a:latin typeface="Calibri" pitchFamily="34" charset="0"/>
+                <a:ea typeface="Calibri" pitchFamily="34" charset="-122"/>
+                <a:cs typeface="Calibri" pitchFamily="34" charset="-120"/>
+              </a:rPr>
+              <a:t>✅ 返回执行结果给用户</a:t>
+            </a:r>
+            <a:endParaRPr lang="en-US" sz="750" dirty="0"/>
+          </a:p>
+        </p:txBody>
+      </p:sp>
+      <p:sp>
+        <p:nvSpPr>
+          <p:cNvPr id="36" name="Text 34"/>
+          <p:cNvSpPr/>
+          <p:nvPr/>
+        </p:nvSpPr>
+        <p:spPr>
+          <a:xfrm>
+            <a:off x="4892040" y="2414016"/>
+            <a:ext cx="3474720" cy="137160"/>
+          </a:xfrm>
+          <a:prstGeom prst="rect">
+            <a:avLst/>
+          </a:prstGeom>
+          <a:noFill/>
+          <a:ln/>
+        </p:spPr>
+        <p:txBody>
+          <a:bodyPr wrap="square" lIns="0" tIns="0" rIns="0" bIns="0" rtlCol="0" anchor="ctr"/>
+          <a:lstStyle/>
+          <a:p>
+            <a:pPr indent="0" marL="0">
+              <a:buNone/>
+            </a:pPr>
+            <a:r>
+              <a:rPr lang="en-US" sz="700" b="1" dirty="0">
+                <a:solidFill>
+                  <a:srgbClr val="D97706"/>
+                </a:solidFill>
+                <a:latin typeface="Calibri" pitchFamily="34" charset="0"/>
+                <a:ea typeface="Calibri" pitchFamily="34" charset="-122"/>
+                <a:cs typeface="Calibri" pitchFamily="34" charset="-120"/>
+              </a:rPr>
+              <a:t>🗣️ 用户输入</a:t>
+            </a:r>
+            <a:endParaRPr lang="en-US" sz="700" dirty="0"/>
+          </a:p>
+        </p:txBody>
+      </p:sp>
+      <p:sp>
+        <p:nvSpPr>
+          <p:cNvPr id="37" name="Text 35"/>
+          <p:cNvSpPr/>
+          <p:nvPr/>
+        </p:nvSpPr>
+        <p:spPr>
+          <a:xfrm>
+            <a:off x="4892040" y="2551176"/>
+            <a:ext cx="3474720" cy="320040"/>
+          </a:xfrm>
+          <a:prstGeom prst="rect">
+            <a:avLst/>
+          </a:prstGeom>
+          <a:noFill/>
+          <a:ln/>
+        </p:spPr>
+        <p:txBody>
+          <a:bodyPr wrap="square" lIns="0" tIns="0" rIns="0" bIns="0" rtlCol="0" anchor="ctr"/>
+          <a:lstStyle/>
+          <a:p>
+            <a:pPr indent="0" marL="0">
+              <a:buNone/>
+            </a:pPr>
+            <a:r>
+              <a:rPr lang="en-US" sz="750" dirty="0">
+                <a:solidFill>
+                  <a:srgbClr val="1E293B"/>
+                </a:solidFill>
+                <a:latin typeface="Calibri" pitchFamily="34" charset="0"/>
+                <a:ea typeface="Calibri" pitchFamily="34" charset="-122"/>
+                <a:cs typeface="Calibri" pitchFamily="34" charset="-120"/>
+              </a:rPr>
+              <a:t>检查系统磁盘使用情况，如果 /dev/sda1 超过 80% 就列出 /var/log 下最大的 5 个文件</a:t>
+            </a:r>
+            <a:endParaRPr lang="en-US" sz="750" dirty="0"/>
+          </a:p>
+        </p:txBody>
+      </p:sp>
+      <p:sp>
+        <p:nvSpPr>
+          <p:cNvPr id="38" name="Text 36"/>
+          <p:cNvSpPr/>
+          <p:nvPr/>
+        </p:nvSpPr>
+        <p:spPr>
+          <a:xfrm>
+            <a:off x="4892040" y="2889504"/>
+            <a:ext cx="3474720" cy="137160"/>
+          </a:xfrm>
+          <a:prstGeom prst="rect">
+            <a:avLst/>
+          </a:prstGeom>
+          <a:noFill/>
+          <a:ln/>
+        </p:spPr>
+        <p:txBody>
+          <a:bodyPr wrap="square" lIns="0" tIns="0" rIns="0" bIns="0" rtlCol="0" anchor="ctr"/>
+          <a:lstStyle/>
+          <a:p>
+            <a:pPr indent="0" marL="0">
+              <a:buNone/>
+            </a:pPr>
+            <a:r>
+              <a:rPr lang="en-US" sz="700" b="1" dirty="0">
+                <a:solidFill>
+                  <a:srgbClr val="059669"/>
+                </a:solidFill>
+                <a:latin typeface="Calibri" pitchFamily="34" charset="0"/>
+                <a:ea typeface="Calibri" pitchFamily="34" charset="-122"/>
+                <a:cs typeface="Calibri" pitchFamily="34" charset="-120"/>
+              </a:rPr>
+              <a:t>🤖 Agent 执行</a:t>
+            </a:r>
+            <a:endParaRPr lang="en-US" sz="700" dirty="0"/>
+          </a:p>
+        </p:txBody>
+      </p:sp>
+      <p:sp>
+        <p:nvSpPr>
+          <p:cNvPr id="39" name="Text 37"/>
+          <p:cNvSpPr/>
+          <p:nvPr/>
+        </p:nvSpPr>
+        <p:spPr>
+          <a:xfrm>
+            <a:off x="4892040" y="3026664"/>
+            <a:ext cx="3474720" cy="320040"/>
+          </a:xfrm>
+          <a:prstGeom prst="rect">
+            <a:avLst/>
+          </a:prstGeom>
+          <a:noFill/>
+          <a:ln/>
+        </p:spPr>
+        <p:txBody>
+          <a:bodyPr wrap="square" lIns="0" tIns="0" rIns="0" bIns="0" rtlCol="0" anchor="ctr"/>
+          <a:lstStyle/>
+          <a:p>
+            <a:pPr indent="0" marL="0">
+              <a:buNone/>
+            </a:pPr>
+            <a:r>
+              <a:rPr lang="en-US" sz="750" dirty="0">
+                <a:solidFill>
+                  <a:srgbClr val="64748B"/>
+                </a:solidFill>
+                <a:latin typeface="Calibri" pitchFamily="34" charset="0"/>
+                <a:ea typeface="Calibri" pitchFamily="34" charset="-122"/>
+                <a:cs typeface="Calibri" pitchFamily="34" charset="-120"/>
+              </a:rPr>
+              <a:t>✅ 执行 df -h 获取磁盘信息</a:t>
+            </a:r>
+            <a:endParaRPr lang="en-US" sz="750" dirty="0"/>
+          </a:p>
+          <a:p>
+            <a:pPr indent="0" marL="0">
+              <a:buNone/>
+            </a:pPr>
+            <a:r>
+              <a:rPr lang="en-US" sz="750" dirty="0">
+                <a:solidFill>
+                  <a:srgbClr val="64748B"/>
+                </a:solidFill>
+                <a:latin typeface="Calibri" pitchFamily="34" charset="0"/>
+                <a:ea typeface="Calibri" pitchFamily="34" charset="-122"/>
+                <a:cs typeface="Calibri" pitchFamily="34" charset="-120"/>
+              </a:rPr>
+              <a:t>✅ 分析使用率 → 判断是否 &gt; 80%</a:t>
+            </a:r>
+            <a:endParaRPr lang="en-US" sz="750" dirty="0"/>
+          </a:p>
+          <a:p>
+            <a:pPr indent="0" marL="0">
+              <a:buNone/>
+            </a:pPr>
+            <a:r>
+              <a:rPr lang="en-US" sz="750" dirty="0">
+                <a:solidFill>
+                  <a:srgbClr val="64748B"/>
+                </a:solidFill>
+                <a:latin typeface="Calibri" pitchFamily="34" charset="0"/>
+                <a:ea typeface="Calibri" pitchFamily="34" charset="-122"/>
+                <a:cs typeface="Calibri" pitchFamily="34" charset="-120"/>
+              </a:rPr>
+              <a:t>✅ 执行 du -sh /var/log/* | sort -rh | head -5</a:t>
+            </a:r>
+            <a:endParaRPr lang="en-US" sz="750" dirty="0"/>
+          </a:p>
+          <a:p>
+            <a:pPr indent="0" marL="0">
+              <a:buNone/>
+            </a:pPr>
+            <a:r>
+              <a:rPr lang="en-US" sz="750" dirty="0">
+                <a:solidFill>
+                  <a:srgbClr val="64748B"/>
+                </a:solidFill>
+                <a:latin typeface="Calibri" pitchFamily="34" charset="0"/>
+                <a:ea typeface="Calibri" pitchFamily="34" charset="-122"/>
+                <a:cs typeface="Calibri" pitchFamily="34" charset="-120"/>
+              </a:rPr>
+              <a:t>✅ 汇总结果报告给用户</a:t>
+            </a:r>
+            <a:endParaRPr lang="en-US" sz="750" dirty="0"/>
+          </a:p>
+        </p:txBody>
+      </p:sp>
+      <p:sp>
+        <p:nvSpPr>
+          <p:cNvPr id="40" name="Shape 38"/>
+          <p:cNvSpPr/>
+          <p:nvPr/>
+        </p:nvSpPr>
+        <p:spPr>
+          <a:xfrm>
+            <a:off x="502920" y="3611880"/>
+            <a:ext cx="8138160" cy="1234440"/>
+          </a:xfrm>
+          <a:prstGeom prst="rect">
+            <a:avLst/>
+          </a:prstGeom>
+          <a:solidFill>
+            <a:srgbClr val="FFFFFF"/>
+          </a:solidFill>
+          <a:ln/>
+          <a:effectLst>
+            <a:outerShdw sx="100000" sy="100000" kx="0" ky="0" algn="bl" rotWithShape="0" blurRad="50800" dist="25400" dir="8100000">
+              <a:srgbClr val="000000">
+                <a:alpha val="8000"/>
+              </a:srgbClr>
+            </a:outerShdw>
+          </a:effectLst>
+        </p:spPr>
+      </p:sp>
+      <p:sp>
+        <p:nvSpPr>
+          <p:cNvPr id="41" name="Text 39"/>
+          <p:cNvSpPr/>
+          <p:nvPr/>
+        </p:nvSpPr>
+        <p:spPr>
+          <a:xfrm>
+            <a:off x="777240" y="3675888"/>
+            <a:ext cx="2743200" cy="256032"/>
+          </a:xfrm>
+          <a:prstGeom prst="rect">
+            <a:avLst/>
+          </a:prstGeom>
+          <a:noFill/>
+          <a:ln/>
+        </p:spPr>
+        <p:txBody>
+          <a:bodyPr wrap="square" lIns="0" tIns="0" rIns="0" bIns="0" rtlCol="0" anchor="ctr"/>
+          <a:lstStyle/>
+          <a:p>
+            <a:pPr indent="0" marL="0">
+              <a:buNone/>
+            </a:pPr>
+            <a:r>
+              <a:rPr lang="en-US" sz="1200" b="1" dirty="0">
+                <a:solidFill>
+                  <a:srgbClr val="028090"/>
+                </a:solidFill>
+                <a:latin typeface="Calibri" pitchFamily="34" charset="0"/>
+                <a:ea typeface="Calibri" pitchFamily="34" charset="-122"/>
+                <a:cs typeface="Calibri" pitchFamily="34" charset="-120"/>
+              </a:rPr>
+              <a:t>Agent 能力一览</a:t>
+            </a:r>
+            <a:endParaRPr lang="en-US" sz="1200" dirty="0"/>
+          </a:p>
+        </p:txBody>
+      </p:sp>
+      <p:sp>
+        <p:nvSpPr>
+          <p:cNvPr id="42" name="Shape 40"/>
+          <p:cNvSpPr/>
+          <p:nvPr/>
+        </p:nvSpPr>
+        <p:spPr>
+          <a:xfrm>
+            <a:off x="777240" y="4005072"/>
+            <a:ext cx="1783080" cy="713232"/>
+          </a:xfrm>
+          <a:prstGeom prst="rect">
+            <a:avLst/>
+          </a:prstGeom>
+          <a:solidFill>
+            <a:srgbClr val="F0FDFA"/>
+          </a:solidFill>
+          <a:ln/>
+        </p:spPr>
+      </p:sp>
+      <p:sp>
+        <p:nvSpPr>
+          <p:cNvPr id="43" name="Text 41"/>
+          <p:cNvSpPr/>
+          <p:nvPr/>
+        </p:nvSpPr>
+        <p:spPr>
+          <a:xfrm>
+            <a:off x="886968" y="4041648"/>
+            <a:ext cx="1554480" cy="201168"/>
+          </a:xfrm>
+          <a:prstGeom prst="rect">
+            <a:avLst/>
+          </a:prstGeom>
+          <a:noFill/>
+          <a:ln/>
+        </p:spPr>
+        <p:txBody>
+          <a:bodyPr wrap="square" lIns="0" tIns="0" rIns="0" bIns="0" rtlCol="0" anchor="ctr"/>
+          <a:lstStyle/>
+          <a:p>
+            <a:pPr indent="0" marL="0">
+              <a:buNone/>
+            </a:pPr>
+            <a:r>
+              <a:rPr lang="en-US" sz="900" b="1" dirty="0">
+                <a:solidFill>
+                  <a:srgbClr val="028090"/>
+                </a:solidFill>
+                <a:latin typeface="Calibri" pitchFamily="34" charset="0"/>
+                <a:ea typeface="Calibri" pitchFamily="34" charset="-122"/>
+                <a:cs typeface="Calibri" pitchFamily="34" charset="-120"/>
+              </a:rPr>
+              <a:t>文件管理</a:t>
+            </a:r>
+            <a:endParaRPr lang="en-US" sz="900" dirty="0"/>
+          </a:p>
+        </p:txBody>
+      </p:sp>
+      <p:sp>
+        <p:nvSpPr>
+          <p:cNvPr id="44" name="Text 42"/>
+          <p:cNvSpPr/>
+          <p:nvPr/>
+        </p:nvSpPr>
+        <p:spPr>
+          <a:xfrm>
+            <a:off x="886968" y="4261104"/>
+            <a:ext cx="1554480" cy="411480"/>
+          </a:xfrm>
+          <a:prstGeom prst="rect">
+            <a:avLst/>
+          </a:prstGeom>
+          <a:noFill/>
+          <a:ln/>
+        </p:spPr>
+        <p:txBody>
           <a:bodyPr wrap="square" rtlCol="0" anchor="ctr"/>
           <a:lstStyle/>
           <a:p>
             <a:pPr indent="0" marL="0">
-              <a:spcAft>
-                <a:spcPts val="800"/>
-              </a:spcAft>
-              <a:buNone/>
-            </a:pPr>
-            <a:r>
-              <a:rPr lang="en-US" sz="1000" dirty="0">
+              <a:buNone/>
+            </a:pPr>
+            <a:r>
+              <a:rPr lang="en-US" sz="800" dirty="0">
                 <a:solidFill>
                   <a:srgbClr val="64748B"/>
                 </a:solidFill>
@@ -6749,105 +7971,309 @@
                 <a:ea typeface="Calibri" pitchFamily="34" charset="-122"/>
                 <a:cs typeface="Calibri" pitchFamily="34" charset="-120"/>
               </a:rPr>
-              <a:t>命令 → 安全检查 → 执行/拦截 → 返回结果</a:t>
-            </a:r>
-            <a:endParaRPr lang="en-US" sz="1000" dirty="0"/>
-          </a:p>
-          <a:p>
-            <a:pPr marL="342900" indent="-342900">
-              <a:buSzPct val="100000"/>
-              <a:buChar char="•"/>
-            </a:pPr>
-            <a:r>
-              <a:rPr lang="en-US" sz="1000" dirty="0">
-                <a:solidFill>
-                  <a:srgbClr val="1E293B"/>
-                </a:solidFill>
-                <a:latin typeface="Calibri" pitchFamily="34" charset="0"/>
-                <a:ea typeface="Calibri" pitchFamily="34" charset="-122"/>
-                <a:cs typeface="Calibri" pitchFamily="34" charset="-120"/>
-              </a:rPr>
-              <a:t>正则匹配：20+ 条危险命令黑名单</a:t>
-            </a:r>
-            <a:endParaRPr lang="en-US" sz="1000" dirty="0"/>
-          </a:p>
-          <a:p>
-            <a:pPr marL="342900" indent="-342900">
-              <a:buSzPct val="100000"/>
-              <a:buChar char="•"/>
-            </a:pPr>
-            <a:r>
-              <a:rPr lang="en-US" sz="1000" dirty="0">
-                <a:solidFill>
-                  <a:srgbClr val="1E293B"/>
-                </a:solidFill>
-                <a:latin typeface="Calibri" pitchFamily="34" charset="0"/>
-                <a:ea typeface="Calibri" pitchFamily="34" charset="-122"/>
-                <a:cs typeface="Calibri" pitchFamily="34" charset="-120"/>
-              </a:rPr>
-              <a:t>AST 分析：Python 脚本语法树检测</a:t>
-            </a:r>
-            <a:endParaRPr lang="en-US" sz="1000" dirty="0"/>
-          </a:p>
-          <a:p>
-            <a:pPr marL="342900" indent="-342900">
-              <a:buSzPct val="100000"/>
-              <a:buChar char="•"/>
-            </a:pPr>
-            <a:r>
-              <a:rPr lang="en-US" sz="1000" dirty="0">
-                <a:solidFill>
-                  <a:srgbClr val="1E293B"/>
-                </a:solidFill>
-                <a:latin typeface="Calibri" pitchFamily="34" charset="0"/>
-                <a:ea typeface="Calibri" pitchFamily="34" charset="-122"/>
-                <a:cs typeface="Calibri" pitchFamily="34" charset="-120"/>
-              </a:rPr>
-              <a:t>三级风险：safe / warning / dangerous</a:t>
-            </a:r>
-            <a:endParaRPr lang="en-US" sz="1000" dirty="0"/>
-          </a:p>
-          <a:p>
-            <a:pPr marL="342900" indent="-342900">
-              <a:buSzPct val="100000"/>
-              <a:buChar char="•"/>
-            </a:pPr>
-            <a:r>
-              <a:rPr lang="en-US" sz="1000" dirty="0">
-                <a:solidFill>
-                  <a:srgbClr val="DC2626"/>
-                </a:solidFill>
-                <a:latin typeface="Calibri" pitchFamily="34" charset="0"/>
-                <a:ea typeface="Calibri" pitchFamily="34" charset="-122"/>
-                <a:cs typeface="Calibri" pitchFamily="34" charset="-120"/>
-              </a:rPr>
-              <a:t>dangerous 级别直接拒绝执行</a:t>
-            </a:r>
-            <a:endParaRPr lang="en-US" sz="1000" dirty="0"/>
-          </a:p>
-          <a:p>
-            <a:pPr marL="342900" indent="-342900">
-              <a:buSzPct val="100000"/>
-              <a:buChar char="•"/>
-            </a:pPr>
-            <a:r>
-              <a:rPr lang="en-US" sz="1000" dirty="0">
-                <a:solidFill>
-                  <a:srgbClr val="1E293B"/>
-                </a:solidFill>
-                <a:latin typeface="Calibri" pitchFamily="34" charset="0"/>
-                <a:ea typeface="Calibri" pitchFamily="34" charset="-122"/>
-                <a:cs typeface="Calibri" pitchFamily="34" charset="-120"/>
-              </a:rPr>
-              <a:t>沙箱工作区隔离 + 30s超时 + 10MB输出截断</a:t>
-            </a:r>
-            <a:endParaRPr lang="en-US" sz="1000" dirty="0"/>
-          </a:p>
-        </p:txBody>
-      </p:sp>
-      <p:sp>
-        <p:nvSpPr>
-          <p:cNvPr id="14" name="Text 12"/>
+              <a:t>创建 · 读取 · 移动 · 删除 · 批量整理分类</a:t>
+            </a:r>
+            <a:endParaRPr lang="en-US" sz="800" dirty="0"/>
+          </a:p>
+        </p:txBody>
+      </p:sp>
+      <p:sp>
+        <p:nvSpPr>
+          <p:cNvPr id="45" name="Shape 43"/>
+          <p:cNvSpPr/>
+          <p:nvPr/>
+        </p:nvSpPr>
+        <p:spPr>
+          <a:xfrm>
+            <a:off x="2743200" y="4005072"/>
+            <a:ext cx="1783080" cy="713232"/>
+          </a:xfrm>
+          <a:prstGeom prst="rect">
+            <a:avLst/>
+          </a:prstGeom>
+          <a:solidFill>
+            <a:srgbClr val="F0FDFA"/>
+          </a:solidFill>
+          <a:ln/>
+        </p:spPr>
+      </p:sp>
+      <p:sp>
+        <p:nvSpPr>
+          <p:cNvPr id="46" name="Text 44"/>
+          <p:cNvSpPr/>
+          <p:nvPr/>
+        </p:nvSpPr>
+        <p:spPr>
+          <a:xfrm>
+            <a:off x="2852928" y="4041648"/>
+            <a:ext cx="1554480" cy="201168"/>
+          </a:xfrm>
+          <a:prstGeom prst="rect">
+            <a:avLst/>
+          </a:prstGeom>
+          <a:noFill/>
+          <a:ln/>
+        </p:spPr>
+        <p:txBody>
+          <a:bodyPr wrap="square" lIns="0" tIns="0" rIns="0" bIns="0" rtlCol="0" anchor="ctr"/>
+          <a:lstStyle/>
+          <a:p>
+            <a:pPr indent="0" marL="0">
+              <a:buNone/>
+            </a:pPr>
+            <a:r>
+              <a:rPr lang="en-US" sz="900" b="1" dirty="0">
+                <a:solidFill>
+                  <a:srgbClr val="00A896"/>
+                </a:solidFill>
+                <a:latin typeface="Calibri" pitchFamily="34" charset="0"/>
+                <a:ea typeface="Calibri" pitchFamily="34" charset="-122"/>
+                <a:cs typeface="Calibri" pitchFamily="34" charset="-120"/>
+              </a:rPr>
+              <a:t>Shell 执行</a:t>
+            </a:r>
+            <a:endParaRPr lang="en-US" sz="900" dirty="0"/>
+          </a:p>
+        </p:txBody>
+      </p:sp>
+      <p:sp>
+        <p:nvSpPr>
+          <p:cNvPr id="47" name="Text 45"/>
+          <p:cNvSpPr/>
+          <p:nvPr/>
+        </p:nvSpPr>
+        <p:spPr>
+          <a:xfrm>
+            <a:off x="2852928" y="4261104"/>
+            <a:ext cx="1554480" cy="411480"/>
+          </a:xfrm>
+          <a:prstGeom prst="rect">
+            <a:avLst/>
+          </a:prstGeom>
+          <a:noFill/>
+          <a:ln/>
+        </p:spPr>
+        <p:txBody>
+          <a:bodyPr wrap="square" rtlCol="0" anchor="ctr"/>
+          <a:lstStyle/>
+          <a:p>
+            <a:pPr indent="0" marL="0">
+              <a:buNone/>
+            </a:pPr>
+            <a:r>
+              <a:rPr lang="en-US" sz="800" dirty="0">
+                <a:solidFill>
+                  <a:srgbClr val="64748B"/>
+                </a:solidFill>
+                <a:latin typeface="Calibri" pitchFamily="34" charset="0"/>
+                <a:ea typeface="Calibri" pitchFamily="34" charset="-122"/>
+                <a:cs typeface="Calibri" pitchFamily="34" charset="-120"/>
+              </a:rPr>
+              <a:t>系统命令 · 脚本运行 · 管道组合 · 输出捕获</a:t>
+            </a:r>
+            <a:endParaRPr lang="en-US" sz="800" dirty="0"/>
+          </a:p>
+        </p:txBody>
+      </p:sp>
+      <p:sp>
+        <p:nvSpPr>
+          <p:cNvPr id="48" name="Shape 46"/>
+          <p:cNvSpPr/>
+          <p:nvPr/>
+        </p:nvSpPr>
+        <p:spPr>
+          <a:xfrm>
+            <a:off x="4709160" y="4005072"/>
+            <a:ext cx="1783080" cy="713232"/>
+          </a:xfrm>
+          <a:prstGeom prst="rect">
+            <a:avLst/>
+          </a:prstGeom>
+          <a:solidFill>
+            <a:srgbClr val="F0FDFA"/>
+          </a:solidFill>
+          <a:ln/>
+        </p:spPr>
+      </p:sp>
+      <p:sp>
+        <p:nvSpPr>
+          <p:cNvPr id="49" name="Text 47"/>
+          <p:cNvSpPr/>
+          <p:nvPr/>
+        </p:nvSpPr>
+        <p:spPr>
+          <a:xfrm>
+            <a:off x="4818888" y="4041648"/>
+            <a:ext cx="1554480" cy="201168"/>
+          </a:xfrm>
+          <a:prstGeom prst="rect">
+            <a:avLst/>
+          </a:prstGeom>
+          <a:noFill/>
+          <a:ln/>
+        </p:spPr>
+        <p:txBody>
+          <a:bodyPr wrap="square" lIns="0" tIns="0" rIns="0" bIns="0" rtlCol="0" anchor="ctr"/>
+          <a:lstStyle/>
+          <a:p>
+            <a:pPr indent="0" marL="0">
+              <a:buNone/>
+            </a:pPr>
+            <a:r>
+              <a:rPr lang="en-US" sz="900" b="1" dirty="0">
+                <a:solidFill>
+                  <a:srgbClr val="02C39A"/>
+                </a:solidFill>
+                <a:latin typeface="Calibri" pitchFamily="34" charset="0"/>
+                <a:ea typeface="Calibri" pitchFamily="34" charset="-122"/>
+                <a:cs typeface="Calibri" pitchFamily="34" charset="-120"/>
+              </a:rPr>
+              <a:t>系统巡检</a:t>
+            </a:r>
+            <a:endParaRPr lang="en-US" sz="900" dirty="0"/>
+          </a:p>
+        </p:txBody>
+      </p:sp>
+      <p:sp>
+        <p:nvSpPr>
+          <p:cNvPr id="50" name="Text 48"/>
+          <p:cNvSpPr/>
+          <p:nvPr/>
+        </p:nvSpPr>
+        <p:spPr>
+          <a:xfrm>
+            <a:off x="4818888" y="4261104"/>
+            <a:ext cx="1554480" cy="411480"/>
+          </a:xfrm>
+          <a:prstGeom prst="rect">
+            <a:avLst/>
+          </a:prstGeom>
+          <a:noFill/>
+          <a:ln/>
+        </p:spPr>
+        <p:txBody>
+          <a:bodyPr wrap="square" rtlCol="0" anchor="ctr"/>
+          <a:lstStyle/>
+          <a:p>
+            <a:pPr indent="0" marL="0">
+              <a:buNone/>
+            </a:pPr>
+            <a:r>
+              <a:rPr lang="en-US" sz="800" dirty="0">
+                <a:solidFill>
+                  <a:srgbClr val="64748B"/>
+                </a:solidFill>
+                <a:latin typeface="Calibri" pitchFamily="34" charset="0"/>
+                <a:ea typeface="Calibri" pitchFamily="34" charset="-122"/>
+                <a:cs typeface="Calibri" pitchFamily="34" charset="-120"/>
+              </a:rPr>
+              <a:t>CPU/内存/磁盘监控 · 僵尸进程检测 · crontab 定时</a:t>
+            </a:r>
+            <a:endParaRPr lang="en-US" sz="800" dirty="0"/>
+          </a:p>
+        </p:txBody>
+      </p:sp>
+      <p:sp>
+        <p:nvSpPr>
+          <p:cNvPr id="51" name="Shape 49"/>
+          <p:cNvSpPr/>
+          <p:nvPr/>
+        </p:nvSpPr>
+        <p:spPr>
+          <a:xfrm>
+            <a:off x="6675120" y="4005072"/>
+            <a:ext cx="1783080" cy="713232"/>
+          </a:xfrm>
+          <a:prstGeom prst="rect">
+            <a:avLst/>
+          </a:prstGeom>
+          <a:solidFill>
+            <a:srgbClr val="F0FDFA"/>
+          </a:solidFill>
+          <a:ln/>
+        </p:spPr>
+      </p:sp>
+      <p:sp>
+        <p:nvSpPr>
+          <p:cNvPr id="52" name="Text 50"/>
+          <p:cNvSpPr/>
+          <p:nvPr/>
+        </p:nvSpPr>
+        <p:spPr>
+          <a:xfrm>
+            <a:off x="6784848" y="4041648"/>
+            <a:ext cx="1554480" cy="201168"/>
+          </a:xfrm>
+          <a:prstGeom prst="rect">
+            <a:avLst/>
+          </a:prstGeom>
+          <a:noFill/>
+          <a:ln/>
+        </p:spPr>
+        <p:txBody>
+          <a:bodyPr wrap="square" lIns="0" tIns="0" rIns="0" bIns="0" rtlCol="0" anchor="ctr"/>
+          <a:lstStyle/>
+          <a:p>
+            <a:pPr indent="0" marL="0">
+              <a:buNone/>
+            </a:pPr>
+            <a:r>
+              <a:rPr lang="en-US" sz="900" b="1" dirty="0">
+                <a:solidFill>
+                  <a:srgbClr val="0D9488"/>
+                </a:solidFill>
+                <a:latin typeface="Calibri" pitchFamily="34" charset="0"/>
+                <a:ea typeface="Calibri" pitchFamily="34" charset="-122"/>
+                <a:cs typeface="Calibri" pitchFamily="34" charset="-120"/>
+              </a:rPr>
+              <a:t>智能交互</a:t>
+            </a:r>
+            <a:endParaRPr lang="en-US" sz="900" dirty="0"/>
+          </a:p>
+        </p:txBody>
+      </p:sp>
+      <p:sp>
+        <p:nvSpPr>
+          <p:cNvPr id="53" name="Text 51"/>
+          <p:cNvSpPr/>
+          <p:nvPr/>
+        </p:nvSpPr>
+        <p:spPr>
+          <a:xfrm>
+            <a:off x="6784848" y="4261104"/>
+            <a:ext cx="1554480" cy="411480"/>
+          </a:xfrm>
+          <a:prstGeom prst="rect">
+            <a:avLst/>
+          </a:prstGeom>
+          <a:noFill/>
+          <a:ln/>
+        </p:spPr>
+        <p:txBody>
+          <a:bodyPr wrap="square" rtlCol="0" anchor="ctr"/>
+          <a:lstStyle/>
+          <a:p>
+            <a:pPr indent="0" marL="0">
+              <a:buNone/>
+            </a:pPr>
+            <a:r>
+              <a:rPr lang="en-US" sz="800" dirty="0">
+                <a:solidFill>
+                  <a:srgbClr val="64748B"/>
+                </a:solidFill>
+                <a:latin typeface="Calibri" pitchFamily="34" charset="0"/>
+                <a:ea typeface="Calibri" pitchFamily="34" charset="-122"/>
+                <a:cs typeface="Calibri" pitchFamily="34" charset="-120"/>
+              </a:rPr>
+              <a:t>多轮对话 · 上下文记忆 · 失败重试 · 自我修正</a:t>
+            </a:r>
+            <a:endParaRPr lang="en-US" sz="800" dirty="0"/>
+          </a:p>
+        </p:txBody>
+      </p:sp>
+      <p:sp>
+        <p:nvSpPr>
+          <p:cNvPr id="54" name="Text 52"/>
           <p:cNvSpPr/>
           <p:nvPr/>
         </p:nvSpPr>
@@ -6969,7 +8395,7 @@
                 <a:ea typeface="Cambria" pitchFamily="34" charset="-122"/>
                 <a:cs typeface="Cambria" pitchFamily="34" charset="-120"/>
               </a:rPr>
-              <a:t>测试与验证</a:t>
+              <a:t>安全防护体系</a:t>
             </a:r>
             <a:endParaRPr lang="en-US" sz="2800" dirty="0"/>
           </a:p>
@@ -7028,7 +8454,7 @@
                 <a:ea typeface="Calibri" pitchFamily="34" charset="-122"/>
                 <a:cs typeface="Calibri" pitchFamily="34" charset="-120"/>
               </a:rPr>
-              <a:t>4 个测试套件 · 覆盖功能/异常/边界/安全</a:t>
+              <a:t>五层防护 · 全局文件系统可访问 · 系统/用户关键路径保护</a:t>
             </a:r>
             <a:endParaRPr lang="en-US" sz="1200" dirty="0"/>
           </a:p>
@@ -7042,8 +8468,8 @@
         </p:nvSpPr>
         <p:spPr>
           <a:xfrm>
-            <a:off x="594360" y="1143000"/>
-            <a:ext cx="1874520" cy="1691640"/>
+            <a:off x="365760" y="1051560"/>
+            <a:ext cx="1554480" cy="868680"/>
           </a:xfrm>
           <a:prstGeom prst="rect">
             <a:avLst/>
@@ -7063,14 +8489,34 @@
       </p:sp>
       <p:sp>
         <p:nvSpPr>
-          <p:cNvPr id="7" name="Text 5"/>
-          <p:cNvSpPr/>
-          <p:nvPr/>
-        </p:nvSpPr>
-        <p:spPr>
-          <a:xfrm>
-            <a:off x="731520" y="1216152"/>
-            <a:ext cx="1600200" cy="274320"/>
+          <p:cNvPr id="7" name="Shape 5"/>
+          <p:cNvSpPr/>
+          <p:nvPr/>
+        </p:nvSpPr>
+        <p:spPr>
+          <a:xfrm>
+            <a:off x="365760" y="1051560"/>
+            <a:ext cx="1554480" cy="45720"/>
+          </a:xfrm>
+          <a:prstGeom prst="rect">
+            <a:avLst/>
+          </a:prstGeom>
+          <a:solidFill>
+            <a:srgbClr val="028090"/>
+          </a:solidFill>
+          <a:ln/>
+        </p:spPr>
+      </p:sp>
+      <p:sp>
+        <p:nvSpPr>
+          <p:cNvPr id="8" name="Text 6"/>
+          <p:cNvSpPr/>
+          <p:nvPr/>
+        </p:nvSpPr>
+        <p:spPr>
+          <a:xfrm>
+            <a:off x="457200" y="1115568"/>
+            <a:ext cx="1371600" cy="457200"/>
           </a:xfrm>
           <a:prstGeom prst="rect">
             <a:avLst/>
@@ -7082,11 +8528,11 @@
           <a:bodyPr wrap="square" lIns="0" tIns="0" rIns="0" bIns="0" rtlCol="0" anchor="ctr"/>
           <a:lstStyle/>
           <a:p>
-            <a:pPr indent="0" marL="0">
-              <a:buNone/>
-            </a:pPr>
-            <a:r>
-              <a:rPr lang="en-US" sz="1300" b="1" dirty="0">
+            <a:pPr algn="ctr" indent="0" marL="0">
+              <a:buNone/>
+            </a:pPr>
+            <a:r>
+              <a:rPr lang="en-US" sz="800" b="1" dirty="0">
                 <a:solidFill>
                   <a:srgbClr val="028090"/>
                 </a:solidFill>
@@ -7094,22 +8540,39 @@
                 <a:ea typeface="Calibri" pitchFamily="34" charset="-122"/>
                 <a:cs typeface="Calibri" pitchFamily="34" charset="-120"/>
               </a:rPr>
-              <a:t>功能测试</a:t>
-            </a:r>
-            <a:endParaRPr lang="en-US" sz="1300" dirty="0"/>
-          </a:p>
-        </p:txBody>
-      </p:sp>
-      <p:sp>
-        <p:nvSpPr>
-          <p:cNvPr id="8" name="Text 6"/>
-          <p:cNvSpPr/>
-          <p:nvPr/>
-        </p:nvSpPr>
-        <p:spPr>
-          <a:xfrm>
-            <a:off x="731520" y="1463040"/>
-            <a:ext cx="914400" cy="365760"/>
+              <a:t>Layer 1</a:t>
+            </a:r>
+            <a:endParaRPr lang="en-US" sz="800" dirty="0"/>
+          </a:p>
+          <a:p>
+            <a:pPr algn="ctr" indent="0" marL="0">
+              <a:buNone/>
+            </a:pPr>
+            <a:r>
+              <a:rPr lang="en-US" sz="800" b="1" dirty="0">
+                <a:solidFill>
+                  <a:srgbClr val="028090"/>
+                </a:solidFill>
+                <a:latin typeface="Calibri" pitchFamily="34" charset="0"/>
+                <a:ea typeface="Calibri" pitchFamily="34" charset="-122"/>
+                <a:cs typeface="Calibri" pitchFamily="34" charset="-120"/>
+              </a:rPr>
+              <a:t>系统路径保护</a:t>
+            </a:r>
+            <a:endParaRPr lang="en-US" sz="800" dirty="0"/>
+          </a:p>
+        </p:txBody>
+      </p:sp>
+      <p:sp>
+        <p:nvSpPr>
+          <p:cNvPr id="9" name="Text 7"/>
+          <p:cNvSpPr/>
+          <p:nvPr/>
+        </p:nvSpPr>
+        <p:spPr>
+          <a:xfrm>
+            <a:off x="457200" y="1508760"/>
+            <a:ext cx="1371600" cy="365760"/>
           </a:xfrm>
           <a:prstGeom prst="rect">
             <a:avLst/>
@@ -7118,92 +8581,14 @@
           <a:ln/>
         </p:spPr>
         <p:txBody>
-          <a:bodyPr wrap="square" lIns="0" tIns="0" rIns="0" bIns="0" rtlCol="0" anchor="ctr"/>
-          <a:lstStyle/>
-          <a:p>
-            <a:pPr indent="0" marL="0">
-              <a:buNone/>
-            </a:pPr>
-            <a:r>
-              <a:rPr lang="en-US" sz="2200" b="1" dirty="0">
-                <a:solidFill>
-                  <a:srgbClr val="1E293B"/>
-                </a:solidFill>
-                <a:latin typeface="Cambria" pitchFamily="34" charset="0"/>
-                <a:ea typeface="Cambria" pitchFamily="34" charset="-122"/>
-                <a:cs typeface="Cambria" pitchFamily="34" charset="-120"/>
-              </a:rPr>
-              <a:t>7项</a:t>
-            </a:r>
-            <a:endParaRPr lang="en-US" sz="2200" dirty="0"/>
-          </a:p>
-        </p:txBody>
-      </p:sp>
-      <p:sp>
-        <p:nvSpPr>
-          <p:cNvPr id="9" name="Text 7"/>
-          <p:cNvSpPr/>
-          <p:nvPr/>
-        </p:nvSpPr>
-        <p:spPr>
-          <a:xfrm>
-            <a:off x="1600200" y="1536192"/>
-            <a:ext cx="731520" cy="228600"/>
-          </a:xfrm>
-          <a:prstGeom prst="rect">
-            <a:avLst/>
-          </a:prstGeom>
-          <a:noFill/>
-          <a:ln/>
-        </p:spPr>
-        <p:txBody>
-          <a:bodyPr wrap="square" lIns="0" tIns="0" rIns="0" bIns="0" rtlCol="0" anchor="ctr"/>
-          <a:lstStyle/>
-          <a:p>
-            <a:pPr indent="0" marL="0">
-              <a:buNone/>
-            </a:pPr>
-            <a:r>
-              <a:rPr lang="en-US" sz="900" dirty="0">
-                <a:solidFill>
-                  <a:srgbClr val="059669"/>
-                </a:solidFill>
-                <a:latin typeface="Calibri" pitchFamily="34" charset="0"/>
-                <a:ea typeface="Calibri" pitchFamily="34" charset="-122"/>
-                <a:cs typeface="Calibri" pitchFamily="34" charset="-120"/>
-              </a:rPr>
-              <a:t>全部通过</a:t>
-            </a:r>
-            <a:endParaRPr lang="en-US" sz="900" dirty="0"/>
-          </a:p>
-        </p:txBody>
-      </p:sp>
-      <p:sp>
-        <p:nvSpPr>
-          <p:cNvPr id="10" name="Text 8"/>
-          <p:cNvSpPr/>
-          <p:nvPr/>
-        </p:nvSpPr>
-        <p:spPr>
-          <a:xfrm>
-            <a:off x="731520" y="1920240"/>
-            <a:ext cx="1600200" cy="731520"/>
-          </a:xfrm>
-          <a:prstGeom prst="rect">
-            <a:avLst/>
-          </a:prstGeom>
-          <a:noFill/>
-          <a:ln/>
-        </p:spPr>
-        <p:txBody>
           <a:bodyPr wrap="square" rtlCol="0" anchor="ctr"/>
           <a:lstStyle/>
           <a:p>
-            <a:pPr indent="0" marL="0">
-              <a:buNone/>
-            </a:pPr>
-            <a:r>
-              <a:rPr lang="en-US" sz="800" dirty="0">
+            <a:pPr algn="ctr" indent="0" marL="0">
+              <a:buNone/>
+            </a:pPr>
+            <a:r>
+              <a:rPr lang="en-US" sz="700" dirty="0">
                 <a:solidFill>
                   <a:srgbClr val="64748B"/>
                 </a:solidFill>
@@ -7211,22 +8596,39 @@
                 <a:ea typeface="Calibri" pitchFamily="34" charset="-122"/>
                 <a:cs typeface="Calibri" pitchFamily="34" charset="-120"/>
               </a:rPr>
-              <a:t>文件CRUD · 系统信息 · 多轮对话 · 文件分类</a:t>
-            </a:r>
-            <a:endParaRPr lang="en-US" sz="800" dirty="0"/>
-          </a:p>
-        </p:txBody>
-      </p:sp>
-      <p:sp>
-        <p:nvSpPr>
-          <p:cNvPr id="11" name="Shape 9"/>
-          <p:cNvSpPr/>
-          <p:nvPr/>
-        </p:nvSpPr>
-        <p:spPr>
-          <a:xfrm>
-            <a:off x="2651760" y="1143000"/>
-            <a:ext cx="1874520" cy="1691640"/>
+              <a:t>14个路径</a:t>
+            </a:r>
+            <a:endParaRPr lang="en-US" sz="700" dirty="0"/>
+          </a:p>
+          <a:p>
+            <a:pPr algn="ctr" indent="0" marL="0">
+              <a:buNone/>
+            </a:pPr>
+            <a:r>
+              <a:rPr lang="en-US" sz="700" dirty="0">
+                <a:solidFill>
+                  <a:srgbClr val="64748B"/>
+                </a:solidFill>
+                <a:latin typeface="Calibri" pitchFamily="34" charset="0"/>
+                <a:ea typeface="Calibri" pitchFamily="34" charset="-122"/>
+                <a:cs typeface="Calibri" pitchFamily="34" charset="-120"/>
+              </a:rPr>
+              <a:t>write/delete/move 拒绝</a:t>
+            </a:r>
+            <a:endParaRPr lang="en-US" sz="700" dirty="0"/>
+          </a:p>
+        </p:txBody>
+      </p:sp>
+      <p:sp>
+        <p:nvSpPr>
+          <p:cNvPr id="10" name="Shape 8"/>
+          <p:cNvSpPr/>
+          <p:nvPr/>
+        </p:nvSpPr>
+        <p:spPr>
+          <a:xfrm>
+            <a:off x="2084832" y="1051560"/>
+            <a:ext cx="1554480" cy="868680"/>
           </a:xfrm>
           <a:prstGeom prst="rect">
             <a:avLst/>
@@ -7246,14 +8648,34 @@
       </p:sp>
       <p:sp>
         <p:nvSpPr>
+          <p:cNvPr id="11" name="Shape 9"/>
+          <p:cNvSpPr/>
+          <p:nvPr/>
+        </p:nvSpPr>
+        <p:spPr>
+          <a:xfrm>
+            <a:off x="2084832" y="1051560"/>
+            <a:ext cx="1554480" cy="45720"/>
+          </a:xfrm>
+          <a:prstGeom prst="rect">
+            <a:avLst/>
+          </a:prstGeom>
+          <a:solidFill>
+            <a:srgbClr val="00A896"/>
+          </a:solidFill>
+          <a:ln/>
+        </p:spPr>
+      </p:sp>
+      <p:sp>
+        <p:nvSpPr>
           <p:cNvPr id="12" name="Text 10"/>
           <p:cNvSpPr/>
           <p:nvPr/>
         </p:nvSpPr>
         <p:spPr>
           <a:xfrm>
-            <a:off x="2788920" y="1216152"/>
-            <a:ext cx="1600200" cy="274320"/>
+            <a:off x="2176272" y="1115568"/>
+            <a:ext cx="1371600" cy="457200"/>
           </a:xfrm>
           <a:prstGeom prst="rect">
             <a:avLst/>
@@ -7265,21 +8687,38 @@
           <a:bodyPr wrap="square" lIns="0" tIns="0" rIns="0" bIns="0" rtlCol="0" anchor="ctr"/>
           <a:lstStyle/>
           <a:p>
-            <a:pPr indent="0" marL="0">
-              <a:buNone/>
-            </a:pPr>
-            <a:r>
-              <a:rPr lang="en-US" sz="1300" b="1" dirty="0">
-                <a:solidFill>
-                  <a:srgbClr val="028090"/>
-                </a:solidFill>
-                <a:latin typeface="Calibri" pitchFamily="34" charset="0"/>
-                <a:ea typeface="Calibri" pitchFamily="34" charset="-122"/>
-                <a:cs typeface="Calibri" pitchFamily="34" charset="-120"/>
-              </a:rPr>
-              <a:t>异常测试</a:t>
-            </a:r>
-            <a:endParaRPr lang="en-US" sz="1300" dirty="0"/>
+            <a:pPr algn="ctr" indent="0" marL="0">
+              <a:buNone/>
+            </a:pPr>
+            <a:r>
+              <a:rPr lang="en-US" sz="800" b="1" dirty="0">
+                <a:solidFill>
+                  <a:srgbClr val="00A896"/>
+                </a:solidFill>
+                <a:latin typeface="Calibri" pitchFamily="34" charset="0"/>
+                <a:ea typeface="Calibri" pitchFamily="34" charset="-122"/>
+                <a:cs typeface="Calibri" pitchFamily="34" charset="-120"/>
+              </a:rPr>
+              <a:t>Layer 2</a:t>
+            </a:r>
+            <a:endParaRPr lang="en-US" sz="800" dirty="0"/>
+          </a:p>
+          <a:p>
+            <a:pPr algn="ctr" indent="0" marL="0">
+              <a:buNone/>
+            </a:pPr>
+            <a:r>
+              <a:rPr lang="en-US" sz="800" b="1" dirty="0">
+                <a:solidFill>
+                  <a:srgbClr val="00A896"/>
+                </a:solidFill>
+                <a:latin typeface="Calibri" pitchFamily="34" charset="0"/>
+                <a:ea typeface="Calibri" pitchFamily="34" charset="-122"/>
+                <a:cs typeface="Calibri" pitchFamily="34" charset="-120"/>
+              </a:rPr>
+              <a:t>用户安全保护</a:t>
+            </a:r>
+            <a:endParaRPr lang="en-US" sz="800" dirty="0"/>
           </a:p>
         </p:txBody>
       </p:sp>
@@ -7291,8 +8730,8 @@
         </p:nvSpPr>
         <p:spPr>
           <a:xfrm>
-            <a:off x="2788920" y="1463040"/>
-            <a:ext cx="914400" cy="365760"/>
+            <a:off x="2176272" y="1508760"/>
+            <a:ext cx="1371600" cy="365760"/>
           </a:xfrm>
           <a:prstGeom prst="rect">
             <a:avLst/>
@@ -7301,92 +8740,14 @@
           <a:ln/>
         </p:spPr>
         <p:txBody>
-          <a:bodyPr wrap="square" lIns="0" tIns="0" rIns="0" bIns="0" rtlCol="0" anchor="ctr"/>
-          <a:lstStyle/>
-          <a:p>
-            <a:pPr indent="0" marL="0">
-              <a:buNone/>
-            </a:pPr>
-            <a:r>
-              <a:rPr lang="en-US" sz="2200" b="1" dirty="0">
-                <a:solidFill>
-                  <a:srgbClr val="1E293B"/>
-                </a:solidFill>
-                <a:latin typeface="Cambria" pitchFamily="34" charset="0"/>
-                <a:ea typeface="Cambria" pitchFamily="34" charset="-122"/>
-                <a:cs typeface="Cambria" pitchFamily="34" charset="-120"/>
-              </a:rPr>
-              <a:t>5项</a:t>
-            </a:r>
-            <a:endParaRPr lang="en-US" sz="2200" dirty="0"/>
-          </a:p>
-        </p:txBody>
-      </p:sp>
-      <p:sp>
-        <p:nvSpPr>
-          <p:cNvPr id="14" name="Text 12"/>
-          <p:cNvSpPr/>
-          <p:nvPr/>
-        </p:nvSpPr>
-        <p:spPr>
-          <a:xfrm>
-            <a:off x="3657600" y="1536192"/>
-            <a:ext cx="731520" cy="228600"/>
-          </a:xfrm>
-          <a:prstGeom prst="rect">
-            <a:avLst/>
-          </a:prstGeom>
-          <a:noFill/>
-          <a:ln/>
-        </p:spPr>
-        <p:txBody>
-          <a:bodyPr wrap="square" lIns="0" tIns="0" rIns="0" bIns="0" rtlCol="0" anchor="ctr"/>
-          <a:lstStyle/>
-          <a:p>
-            <a:pPr indent="0" marL="0">
-              <a:buNone/>
-            </a:pPr>
-            <a:r>
-              <a:rPr lang="en-US" sz="900" dirty="0">
-                <a:solidFill>
-                  <a:srgbClr val="059669"/>
-                </a:solidFill>
-                <a:latin typeface="Calibri" pitchFamily="34" charset="0"/>
-                <a:ea typeface="Calibri" pitchFamily="34" charset="-122"/>
-                <a:cs typeface="Calibri" pitchFamily="34" charset="-120"/>
-              </a:rPr>
-              <a:t>全部通过</a:t>
-            </a:r>
-            <a:endParaRPr lang="en-US" sz="900" dirty="0"/>
-          </a:p>
-        </p:txBody>
-      </p:sp>
-      <p:sp>
-        <p:nvSpPr>
-          <p:cNvPr id="15" name="Text 13"/>
-          <p:cNvSpPr/>
-          <p:nvPr/>
-        </p:nvSpPr>
-        <p:spPr>
-          <a:xfrm>
-            <a:off x="2788920" y="1920240"/>
-            <a:ext cx="1600200" cy="731520"/>
-          </a:xfrm>
-          <a:prstGeom prst="rect">
-            <a:avLst/>
-          </a:prstGeom>
-          <a:noFill/>
-          <a:ln/>
-        </p:spPr>
-        <p:txBody>
           <a:bodyPr wrap="square" rtlCol="0" anchor="ctr"/>
           <a:lstStyle/>
           <a:p>
-            <a:pPr indent="0" marL="0">
-              <a:buNone/>
-            </a:pPr>
-            <a:r>
-              <a:rPr lang="en-US" sz="800" dirty="0">
+            <a:pPr algn="ctr" indent="0" marL="0">
+              <a:buNone/>
+            </a:pPr>
+            <a:r>
+              <a:rPr lang="en-US" sz="700" dirty="0">
                 <a:solidFill>
                   <a:srgbClr val="64748B"/>
                 </a:solidFill>
@@ -7394,22 +8755,39 @@
                 <a:ea typeface="Calibri" pitchFamily="34" charset="-122"/>
                 <a:cs typeface="Calibri" pitchFamily="34" charset="-120"/>
               </a:rPr>
-              <a:t>文件不存在 · 权限不足 · 网络断开 · 语法错误</a:t>
-            </a:r>
-            <a:endParaRPr lang="en-US" sz="800" dirty="0"/>
-          </a:p>
-        </p:txBody>
-      </p:sp>
-      <p:sp>
-        <p:nvSpPr>
-          <p:cNvPr id="16" name="Shape 14"/>
-          <p:cNvSpPr/>
-          <p:nvPr/>
-        </p:nvSpPr>
-        <p:spPr>
-          <a:xfrm>
-            <a:off x="4709160" y="1143000"/>
-            <a:ext cx="1874520" cy="1691640"/>
+              <a:t>~/.ssh ~/.bashrc</a:t>
+            </a:r>
+            <a:endParaRPr lang="en-US" sz="700" dirty="0"/>
+          </a:p>
+          <a:p>
+            <a:pPr algn="ctr" indent="0" marL="0">
+              <a:buNone/>
+            </a:pPr>
+            <a:r>
+              <a:rPr lang="en-US" sz="700" dirty="0">
+                <a:solidFill>
+                  <a:srgbClr val="64748B"/>
+                </a:solidFill>
+                <a:latin typeface="Calibri" pitchFamily="34" charset="0"/>
+                <a:ea typeface="Calibri" pitchFamily="34" charset="-122"/>
+                <a:cs typeface="Calibri" pitchFamily="34" charset="-120"/>
+              </a:rPr>
+              <a:t>~/.gnupg ~/.profile</a:t>
+            </a:r>
+            <a:endParaRPr lang="en-US" sz="700" dirty="0"/>
+          </a:p>
+        </p:txBody>
+      </p:sp>
+      <p:sp>
+        <p:nvSpPr>
+          <p:cNvPr id="14" name="Shape 12"/>
+          <p:cNvSpPr/>
+          <p:nvPr/>
+        </p:nvSpPr>
+        <p:spPr>
+          <a:xfrm>
+            <a:off x="3803904" y="1051560"/>
+            <a:ext cx="1554480" cy="868680"/>
           </a:xfrm>
           <a:prstGeom prst="rect">
             <a:avLst/>
@@ -7429,14 +8807,90 @@
       </p:sp>
       <p:sp>
         <p:nvSpPr>
+          <p:cNvPr id="15" name="Shape 13"/>
+          <p:cNvSpPr/>
+          <p:nvPr/>
+        </p:nvSpPr>
+        <p:spPr>
+          <a:xfrm>
+            <a:off x="3803904" y="1051560"/>
+            <a:ext cx="1554480" cy="45720"/>
+          </a:xfrm>
+          <a:prstGeom prst="rect">
+            <a:avLst/>
+          </a:prstGeom>
+          <a:solidFill>
+            <a:srgbClr val="02C39A"/>
+          </a:solidFill>
+          <a:ln/>
+        </p:spPr>
+      </p:sp>
+      <p:sp>
+        <p:nvSpPr>
+          <p:cNvPr id="16" name="Text 14"/>
+          <p:cNvSpPr/>
+          <p:nvPr/>
+        </p:nvSpPr>
+        <p:spPr>
+          <a:xfrm>
+            <a:off x="3895344" y="1115568"/>
+            <a:ext cx="1371600" cy="457200"/>
+          </a:xfrm>
+          <a:prstGeom prst="rect">
+            <a:avLst/>
+          </a:prstGeom>
+          <a:noFill/>
+          <a:ln/>
+        </p:spPr>
+        <p:txBody>
+          <a:bodyPr wrap="square" lIns="0" tIns="0" rIns="0" bIns="0" rtlCol="0" anchor="ctr"/>
+          <a:lstStyle/>
+          <a:p>
+            <a:pPr algn="ctr" indent="0" marL="0">
+              <a:buNone/>
+            </a:pPr>
+            <a:r>
+              <a:rPr lang="en-US" sz="800" b="1" dirty="0">
+                <a:solidFill>
+                  <a:srgbClr val="02C39A"/>
+                </a:solidFill>
+                <a:latin typeface="Calibri" pitchFamily="34" charset="0"/>
+                <a:ea typeface="Calibri" pitchFamily="34" charset="-122"/>
+                <a:cs typeface="Calibri" pitchFamily="34" charset="-120"/>
+              </a:rPr>
+              <a:t>Layer 3</a:t>
+            </a:r>
+            <a:endParaRPr lang="en-US" sz="800" dirty="0"/>
+          </a:p>
+          <a:p>
+            <a:pPr algn="ctr" indent="0" marL="0">
+              <a:buNone/>
+            </a:pPr>
+            <a:r>
+              <a:rPr lang="en-US" sz="800" b="1" dirty="0">
+                <a:solidFill>
+                  <a:srgbClr val="02C39A"/>
+                </a:solidFill>
+                <a:latin typeface="Calibri" pitchFamily="34" charset="0"/>
+                <a:ea typeface="Calibri" pitchFamily="34" charset="-122"/>
+                <a:cs typeface="Calibri" pitchFamily="34" charset="-120"/>
+              </a:rPr>
+              <a:t>敏感读取告警</a:t>
+            </a:r>
+            <a:endParaRPr lang="en-US" sz="800" dirty="0"/>
+          </a:p>
+        </p:txBody>
+      </p:sp>
+      <p:sp>
+        <p:nvSpPr>
           <p:cNvPr id="17" name="Text 15"/>
           <p:cNvSpPr/>
           <p:nvPr/>
         </p:nvSpPr>
         <p:spPr>
           <a:xfrm>
-            <a:off x="4846320" y="1216152"/>
-            <a:ext cx="1600200" cy="274320"/>
+            <a:off x="3895344" y="1508760"/>
+            <a:ext cx="1371600" cy="365760"/>
           </a:xfrm>
           <a:prstGeom prst="rect">
             <a:avLst/>
@@ -7445,131 +8899,14 @@
           <a:ln/>
         </p:spPr>
         <p:txBody>
-          <a:bodyPr wrap="square" lIns="0" tIns="0" rIns="0" bIns="0" rtlCol="0" anchor="ctr"/>
-          <a:lstStyle/>
-          <a:p>
-            <a:pPr indent="0" marL="0">
-              <a:buNone/>
-            </a:pPr>
-            <a:r>
-              <a:rPr lang="en-US" sz="1300" b="1" dirty="0">
-                <a:solidFill>
-                  <a:srgbClr val="028090"/>
-                </a:solidFill>
-                <a:latin typeface="Calibri" pitchFamily="34" charset="0"/>
-                <a:ea typeface="Calibri" pitchFamily="34" charset="-122"/>
-                <a:cs typeface="Calibri" pitchFamily="34" charset="-120"/>
-              </a:rPr>
-              <a:t>边界测试</a:t>
-            </a:r>
-            <a:endParaRPr lang="en-US" sz="1300" dirty="0"/>
-          </a:p>
-        </p:txBody>
-      </p:sp>
-      <p:sp>
-        <p:nvSpPr>
-          <p:cNvPr id="18" name="Text 16"/>
-          <p:cNvSpPr/>
-          <p:nvPr/>
-        </p:nvSpPr>
-        <p:spPr>
-          <a:xfrm>
-            <a:off x="4846320" y="1463040"/>
-            <a:ext cx="914400" cy="365760"/>
-          </a:xfrm>
-          <a:prstGeom prst="rect">
-            <a:avLst/>
-          </a:prstGeom>
-          <a:noFill/>
-          <a:ln/>
-        </p:spPr>
-        <p:txBody>
-          <a:bodyPr wrap="square" lIns="0" tIns="0" rIns="0" bIns="0" rtlCol="0" anchor="ctr"/>
-          <a:lstStyle/>
-          <a:p>
-            <a:pPr indent="0" marL="0">
-              <a:buNone/>
-            </a:pPr>
-            <a:r>
-              <a:rPr lang="en-US" sz="2200" b="1" dirty="0">
-                <a:solidFill>
-                  <a:srgbClr val="1E293B"/>
-                </a:solidFill>
-                <a:latin typeface="Cambria" pitchFamily="34" charset="0"/>
-                <a:ea typeface="Cambria" pitchFamily="34" charset="-122"/>
-                <a:cs typeface="Cambria" pitchFamily="34" charset="-120"/>
-              </a:rPr>
-              <a:t>4项</a:t>
-            </a:r>
-            <a:endParaRPr lang="en-US" sz="2200" dirty="0"/>
-          </a:p>
-        </p:txBody>
-      </p:sp>
-      <p:sp>
-        <p:nvSpPr>
-          <p:cNvPr id="19" name="Text 17"/>
-          <p:cNvSpPr/>
-          <p:nvPr/>
-        </p:nvSpPr>
-        <p:spPr>
-          <a:xfrm>
-            <a:off x="5715000" y="1536192"/>
-            <a:ext cx="731520" cy="228600"/>
-          </a:xfrm>
-          <a:prstGeom prst="rect">
-            <a:avLst/>
-          </a:prstGeom>
-          <a:noFill/>
-          <a:ln/>
-        </p:spPr>
-        <p:txBody>
-          <a:bodyPr wrap="square" lIns="0" tIns="0" rIns="0" bIns="0" rtlCol="0" anchor="ctr"/>
-          <a:lstStyle/>
-          <a:p>
-            <a:pPr indent="0" marL="0">
-              <a:buNone/>
-            </a:pPr>
-            <a:r>
-              <a:rPr lang="en-US" sz="900" dirty="0">
-                <a:solidFill>
-                  <a:srgbClr val="059669"/>
-                </a:solidFill>
-                <a:latin typeface="Calibri" pitchFamily="34" charset="0"/>
-                <a:ea typeface="Calibri" pitchFamily="34" charset="-122"/>
-                <a:cs typeface="Calibri" pitchFamily="34" charset="-120"/>
-              </a:rPr>
-              <a:t>全部通过</a:t>
-            </a:r>
-            <a:endParaRPr lang="en-US" sz="900" dirty="0"/>
-          </a:p>
-        </p:txBody>
-      </p:sp>
-      <p:sp>
-        <p:nvSpPr>
-          <p:cNvPr id="20" name="Text 18"/>
-          <p:cNvSpPr/>
-          <p:nvPr/>
-        </p:nvSpPr>
-        <p:spPr>
-          <a:xfrm>
-            <a:off x="4846320" y="1920240"/>
-            <a:ext cx="1600200" cy="731520"/>
-          </a:xfrm>
-          <a:prstGeom prst="rect">
-            <a:avLst/>
-          </a:prstGeom>
-          <a:noFill/>
-          <a:ln/>
-        </p:spPr>
-        <p:txBody>
           <a:bodyPr wrap="square" rtlCol="0" anchor="ctr"/>
           <a:lstStyle/>
           <a:p>
-            <a:pPr indent="0" marL="0">
-              <a:buNone/>
-            </a:pPr>
-            <a:r>
-              <a:rPr lang="en-US" sz="800" dirty="0">
+            <a:pPr algn="ctr" indent="0" marL="0">
+              <a:buNone/>
+            </a:pPr>
+            <a:r>
+              <a:rPr lang="en-US" sz="700" dirty="0">
                 <a:solidFill>
                   <a:srgbClr val="64748B"/>
                 </a:solidFill>
@@ -7577,22 +8914,39 @@
                 <a:ea typeface="Calibri" pitchFamily="34" charset="-122"/>
                 <a:cs typeface="Calibri" pitchFamily="34" charset="-120"/>
               </a:rPr>
-              <a:t>3s超时控制 · 空文件 · 10MB截断 · 中文路径</a:t>
-            </a:r>
-            <a:endParaRPr lang="en-US" sz="800" dirty="0"/>
-          </a:p>
-        </p:txBody>
-      </p:sp>
-      <p:sp>
-        <p:nvSpPr>
-          <p:cNvPr id="21" name="Shape 19"/>
-          <p:cNvSpPr/>
-          <p:nvPr/>
-        </p:nvSpPr>
-        <p:spPr>
-          <a:xfrm>
-            <a:off x="6766560" y="1143000"/>
-            <a:ext cx="1874520" cy="1691640"/>
+              <a:t>/etc/shadow</a:t>
+            </a:r>
+            <a:endParaRPr lang="en-US" sz="700" dirty="0"/>
+          </a:p>
+          <a:p>
+            <a:pPr algn="ctr" indent="0" marL="0">
+              <a:buNone/>
+            </a:pPr>
+            <a:r>
+              <a:rPr lang="en-US" sz="700" dirty="0">
+                <a:solidFill>
+                  <a:srgbClr val="64748B"/>
+                </a:solidFill>
+                <a:latin typeface="Calibri" pitchFamily="34" charset="0"/>
+                <a:ea typeface="Calibri" pitchFamily="34" charset="-122"/>
+                <a:cs typeface="Calibri" pitchFamily="34" charset="-120"/>
+              </a:rPr>
+              <a:t>~/.ssh/id_rsa</a:t>
+            </a:r>
+            <a:endParaRPr lang="en-US" sz="700" dirty="0"/>
+          </a:p>
+        </p:txBody>
+      </p:sp>
+      <p:sp>
+        <p:nvSpPr>
+          <p:cNvPr id="18" name="Shape 16"/>
+          <p:cNvSpPr/>
+          <p:nvPr/>
+        </p:nvSpPr>
+        <p:spPr>
+          <a:xfrm>
+            <a:off x="5522976" y="1051560"/>
+            <a:ext cx="1554480" cy="868680"/>
           </a:xfrm>
           <a:prstGeom prst="rect">
             <a:avLst/>
@@ -7612,14 +8966,34 @@
       </p:sp>
       <p:sp>
         <p:nvSpPr>
-          <p:cNvPr id="22" name="Text 20"/>
-          <p:cNvSpPr/>
-          <p:nvPr/>
-        </p:nvSpPr>
-        <p:spPr>
-          <a:xfrm>
-            <a:off x="6903720" y="1216152"/>
-            <a:ext cx="1600200" cy="274320"/>
+          <p:cNvPr id="19" name="Shape 17"/>
+          <p:cNvSpPr/>
+          <p:nvPr/>
+        </p:nvSpPr>
+        <p:spPr>
+          <a:xfrm>
+            <a:off x="5522976" y="1051560"/>
+            <a:ext cx="1554480" cy="45720"/>
+          </a:xfrm>
+          <a:prstGeom prst="rect">
+            <a:avLst/>
+          </a:prstGeom>
+          <a:solidFill>
+            <a:srgbClr val="0D9488"/>
+          </a:solidFill>
+          <a:ln/>
+        </p:spPr>
+      </p:sp>
+      <p:sp>
+        <p:nvSpPr>
+          <p:cNvPr id="20" name="Text 18"/>
+          <p:cNvSpPr/>
+          <p:nvPr/>
+        </p:nvSpPr>
+        <p:spPr>
+          <a:xfrm>
+            <a:off x="5614416" y="1115568"/>
+            <a:ext cx="1371600" cy="457200"/>
           </a:xfrm>
           <a:prstGeom prst="rect">
             <a:avLst/>
@@ -7631,34 +9005,51 @@
           <a:bodyPr wrap="square" lIns="0" tIns="0" rIns="0" bIns="0" rtlCol="0" anchor="ctr"/>
           <a:lstStyle/>
           <a:p>
-            <a:pPr indent="0" marL="0">
-              <a:buNone/>
-            </a:pPr>
-            <a:r>
-              <a:rPr lang="en-US" sz="1300" b="1" dirty="0">
-                <a:solidFill>
-                  <a:srgbClr val="028090"/>
-                </a:solidFill>
-                <a:latin typeface="Calibri" pitchFamily="34" charset="0"/>
-                <a:ea typeface="Calibri" pitchFamily="34" charset="-122"/>
-                <a:cs typeface="Calibri" pitchFamily="34" charset="-120"/>
-              </a:rPr>
-              <a:t>安全测试</a:t>
-            </a:r>
-            <a:endParaRPr lang="en-US" sz="1300" dirty="0"/>
-          </a:p>
-        </p:txBody>
-      </p:sp>
-      <p:sp>
-        <p:nvSpPr>
-          <p:cNvPr id="23" name="Text 21"/>
-          <p:cNvSpPr/>
-          <p:nvPr/>
-        </p:nvSpPr>
-        <p:spPr>
-          <a:xfrm>
-            <a:off x="6903720" y="1463040"/>
-            <a:ext cx="914400" cy="365760"/>
+            <a:pPr algn="ctr" indent="0" marL="0">
+              <a:buNone/>
+            </a:pPr>
+            <a:r>
+              <a:rPr lang="en-US" sz="800" b="1" dirty="0">
+                <a:solidFill>
+                  <a:srgbClr val="0D9488"/>
+                </a:solidFill>
+                <a:latin typeface="Calibri" pitchFamily="34" charset="0"/>
+                <a:ea typeface="Calibri" pitchFamily="34" charset="-122"/>
+                <a:cs typeface="Calibri" pitchFamily="34" charset="-120"/>
+              </a:rPr>
+              <a:t>Layer 4</a:t>
+            </a:r>
+            <a:endParaRPr lang="en-US" sz="800" dirty="0"/>
+          </a:p>
+          <a:p>
+            <a:pPr algn="ctr" indent="0" marL="0">
+              <a:buNone/>
+            </a:pPr>
+            <a:r>
+              <a:rPr lang="en-US" sz="800" b="1" dirty="0">
+                <a:solidFill>
+                  <a:srgbClr val="0D9488"/>
+                </a:solidFill>
+                <a:latin typeface="Calibri" pitchFamily="34" charset="0"/>
+                <a:ea typeface="Calibri" pitchFamily="34" charset="-122"/>
+                <a:cs typeface="Calibri" pitchFamily="34" charset="-120"/>
+              </a:rPr>
+              <a:t>Shell命令检查</a:t>
+            </a:r>
+            <a:endParaRPr lang="en-US" sz="800" dirty="0"/>
+          </a:p>
+        </p:txBody>
+      </p:sp>
+      <p:sp>
+        <p:nvSpPr>
+          <p:cNvPr id="21" name="Text 19"/>
+          <p:cNvSpPr/>
+          <p:nvPr/>
+        </p:nvSpPr>
+        <p:spPr>
+          <a:xfrm>
+            <a:off x="5614416" y="1508760"/>
+            <a:ext cx="1371600" cy="365760"/>
           </a:xfrm>
           <a:prstGeom prst="rect">
             <a:avLst/>
@@ -7667,92 +9058,14 @@
           <a:ln/>
         </p:spPr>
         <p:txBody>
-          <a:bodyPr wrap="square" lIns="0" tIns="0" rIns="0" bIns="0" rtlCol="0" anchor="ctr"/>
-          <a:lstStyle/>
-          <a:p>
-            <a:pPr indent="0" marL="0">
-              <a:buNone/>
-            </a:pPr>
-            <a:r>
-              <a:rPr lang="en-US" sz="2200" b="1" dirty="0">
-                <a:solidFill>
-                  <a:srgbClr val="1E293B"/>
-                </a:solidFill>
-                <a:latin typeface="Cambria" pitchFamily="34" charset="0"/>
-                <a:ea typeface="Cambria" pitchFamily="34" charset="-122"/>
-                <a:cs typeface="Cambria" pitchFamily="34" charset="-120"/>
-              </a:rPr>
-              <a:t>5项</a:t>
-            </a:r>
-            <a:endParaRPr lang="en-US" sz="2200" dirty="0"/>
-          </a:p>
-        </p:txBody>
-      </p:sp>
-      <p:sp>
-        <p:nvSpPr>
-          <p:cNvPr id="24" name="Text 22"/>
-          <p:cNvSpPr/>
-          <p:nvPr/>
-        </p:nvSpPr>
-        <p:spPr>
-          <a:xfrm>
-            <a:off x="7772400" y="1536192"/>
-            <a:ext cx="731520" cy="228600"/>
-          </a:xfrm>
-          <a:prstGeom prst="rect">
-            <a:avLst/>
-          </a:prstGeom>
-          <a:noFill/>
-          <a:ln/>
-        </p:spPr>
-        <p:txBody>
-          <a:bodyPr wrap="square" lIns="0" tIns="0" rIns="0" bIns="0" rtlCol="0" anchor="ctr"/>
-          <a:lstStyle/>
-          <a:p>
-            <a:pPr indent="0" marL="0">
-              <a:buNone/>
-            </a:pPr>
-            <a:r>
-              <a:rPr lang="en-US" sz="900" dirty="0">
-                <a:solidFill>
-                  <a:srgbClr val="059669"/>
-                </a:solidFill>
-                <a:latin typeface="Calibri" pitchFamily="34" charset="0"/>
-                <a:ea typeface="Calibri" pitchFamily="34" charset="-122"/>
-                <a:cs typeface="Calibri" pitchFamily="34" charset="-120"/>
-              </a:rPr>
-              <a:t>全部拦截</a:t>
-            </a:r>
-            <a:endParaRPr lang="en-US" sz="900" dirty="0"/>
-          </a:p>
-        </p:txBody>
-      </p:sp>
-      <p:sp>
-        <p:nvSpPr>
-          <p:cNvPr id="25" name="Text 23"/>
-          <p:cNvSpPr/>
-          <p:nvPr/>
-        </p:nvSpPr>
-        <p:spPr>
-          <a:xfrm>
-            <a:off x="6903720" y="1920240"/>
-            <a:ext cx="1600200" cy="731520"/>
-          </a:xfrm>
-          <a:prstGeom prst="rect">
-            <a:avLst/>
-          </a:prstGeom>
-          <a:noFill/>
-          <a:ln/>
-        </p:spPr>
-        <p:txBody>
           <a:bodyPr wrap="square" rtlCol="0" anchor="ctr"/>
           <a:lstStyle/>
           <a:p>
-            <a:pPr indent="0" marL="0">
-              <a:buNone/>
-            </a:pPr>
-            <a:r>
-              <a:rPr lang="en-US" sz="800" dirty="0">
+            <a:pPr algn="ctr" indent="0" marL="0">
+              <a:buNone/>
+            </a:pPr>
+            <a:r>
+              <a:rPr lang="en-US" sz="700" dirty="0">
                 <a:solidFill>
                   <a:srgbClr val="64748B"/>
                 </a:solidFill>
@@ -7760,28 +9073,45 @@
                 <a:ea typeface="Calibri" pitchFamily="34" charset="-122"/>
                 <a:cs typeface="Calibri" pitchFamily="34" charset="-120"/>
               </a:rPr>
-              <a:t>rm -rf / · mkfs · curl|sh · dd · systemctl</a:t>
-            </a:r>
-            <a:endParaRPr lang="en-US" sz="800" dirty="0"/>
-          </a:p>
-        </p:txBody>
-      </p:sp>
-      <p:sp>
-        <p:nvSpPr>
-          <p:cNvPr id="26" name="Shape 24"/>
-          <p:cNvSpPr/>
-          <p:nvPr/>
-        </p:nvSpPr>
-        <p:spPr>
-          <a:xfrm>
-            <a:off x="594360" y="3108960"/>
-            <a:ext cx="7955280" cy="1691640"/>
+              <a:t>20+ regex</a:t>
+            </a:r>
+            <a:endParaRPr lang="en-US" sz="700" dirty="0"/>
+          </a:p>
+          <a:p>
+            <a:pPr algn="ctr" indent="0" marL="0">
+              <a:buNone/>
+            </a:pPr>
+            <a:r>
+              <a:rPr lang="en-US" sz="700" dirty="0">
+                <a:solidFill>
+                  <a:srgbClr val="64748B"/>
+                </a:solidFill>
+                <a:latin typeface="Calibri" pitchFamily="34" charset="0"/>
+                <a:ea typeface="Calibri" pitchFamily="34" charset="-122"/>
+                <a:cs typeface="Calibri" pitchFamily="34" charset="-120"/>
+              </a:rPr>
+              <a:t>rm -rf / 等拦截</a:t>
+            </a:r>
+            <a:endParaRPr lang="en-US" sz="700" dirty="0"/>
+          </a:p>
+        </p:txBody>
+      </p:sp>
+      <p:sp>
+        <p:nvSpPr>
+          <p:cNvPr id="22" name="Shape 20"/>
+          <p:cNvSpPr/>
+          <p:nvPr/>
+        </p:nvSpPr>
+        <p:spPr>
+          <a:xfrm>
+            <a:off x="7242048" y="1051560"/>
+            <a:ext cx="1554480" cy="868680"/>
           </a:xfrm>
           <a:prstGeom prst="rect">
             <a:avLst/>
           </a:prstGeom>
           <a:solidFill>
-            <a:srgbClr val="F1F5F9"/>
+            <a:srgbClr val="FFFFFF"/>
           </a:solidFill>
           <a:ln/>
           <a:effectLst>
@@ -7795,14 +9125,173 @@
       </p:sp>
       <p:sp>
         <p:nvSpPr>
+          <p:cNvPr id="23" name="Shape 21"/>
+          <p:cNvSpPr/>
+          <p:nvPr/>
+        </p:nvSpPr>
+        <p:spPr>
+          <a:xfrm>
+            <a:off x="7242048" y="1051560"/>
+            <a:ext cx="1554480" cy="45720"/>
+          </a:xfrm>
+          <a:prstGeom prst="rect">
+            <a:avLst/>
+          </a:prstGeom>
+          <a:solidFill>
+            <a:srgbClr val="0F766E"/>
+          </a:solidFill>
+          <a:ln/>
+        </p:spPr>
+      </p:sp>
+      <p:sp>
+        <p:nvSpPr>
+          <p:cNvPr id="24" name="Text 22"/>
+          <p:cNvSpPr/>
+          <p:nvPr/>
+        </p:nvSpPr>
+        <p:spPr>
+          <a:xfrm>
+            <a:off x="7333488" y="1115568"/>
+            <a:ext cx="1371600" cy="457200"/>
+          </a:xfrm>
+          <a:prstGeom prst="rect">
+            <a:avLst/>
+          </a:prstGeom>
+          <a:noFill/>
+          <a:ln/>
+        </p:spPr>
+        <p:txBody>
+          <a:bodyPr wrap="square" lIns="0" tIns="0" rIns="0" bIns="0" rtlCol="0" anchor="ctr"/>
+          <a:lstStyle/>
+          <a:p>
+            <a:pPr algn="ctr" indent="0" marL="0">
+              <a:buNone/>
+            </a:pPr>
+            <a:r>
+              <a:rPr lang="en-US" sz="800" b="1" dirty="0">
+                <a:solidFill>
+                  <a:srgbClr val="0F766E"/>
+                </a:solidFill>
+                <a:latin typeface="Calibri" pitchFamily="34" charset="0"/>
+                <a:ea typeface="Calibri" pitchFamily="34" charset="-122"/>
+                <a:cs typeface="Calibri" pitchFamily="34" charset="-120"/>
+              </a:rPr>
+              <a:t>Layer 5</a:t>
+            </a:r>
+            <a:endParaRPr lang="en-US" sz="800" dirty="0"/>
+          </a:p>
+          <a:p>
+            <a:pPr algn="ctr" indent="0" marL="0">
+              <a:buNone/>
+            </a:pPr>
+            <a:r>
+              <a:rPr lang="en-US" sz="800" b="1" dirty="0">
+                <a:solidFill>
+                  <a:srgbClr val="0F766E"/>
+                </a:solidFill>
+                <a:latin typeface="Calibri" pitchFamily="34" charset="0"/>
+                <a:ea typeface="Calibri" pitchFamily="34" charset="-122"/>
+                <a:cs typeface="Calibri" pitchFamily="34" charset="-120"/>
+              </a:rPr>
+              <a:t>Python AST</a:t>
+            </a:r>
+            <a:endParaRPr lang="en-US" sz="800" dirty="0"/>
+          </a:p>
+        </p:txBody>
+      </p:sp>
+      <p:sp>
+        <p:nvSpPr>
+          <p:cNvPr id="25" name="Text 23"/>
+          <p:cNvSpPr/>
+          <p:nvPr/>
+        </p:nvSpPr>
+        <p:spPr>
+          <a:xfrm>
+            <a:off x="7333488" y="1508760"/>
+            <a:ext cx="1371600" cy="365760"/>
+          </a:xfrm>
+          <a:prstGeom prst="rect">
+            <a:avLst/>
+          </a:prstGeom>
+          <a:noFill/>
+          <a:ln/>
+        </p:spPr>
+        <p:txBody>
+          <a:bodyPr wrap="square" rtlCol="0" anchor="ctr"/>
+          <a:lstStyle/>
+          <a:p>
+            <a:pPr algn="ctr" indent="0" marL="0">
+              <a:buNone/>
+            </a:pPr>
+            <a:r>
+              <a:rPr lang="en-US" sz="700" dirty="0">
+                <a:solidFill>
+                  <a:srgbClr val="64748B"/>
+                </a:solidFill>
+                <a:latin typeface="Calibri" pitchFamily="34" charset="0"/>
+                <a:ea typeface="Calibri" pitchFamily="34" charset="-122"/>
+                <a:cs typeface="Calibri" pitchFamily="34" charset="-120"/>
+              </a:rPr>
+              <a:t>eval() os.system()</a:t>
+            </a:r>
+            <a:endParaRPr lang="en-US" sz="700" dirty="0"/>
+          </a:p>
+          <a:p>
+            <a:pPr algn="ctr" indent="0" marL="0">
+              <a:buNone/>
+            </a:pPr>
+            <a:r>
+              <a:rPr lang="en-US" sz="700" dirty="0">
+                <a:solidFill>
+                  <a:srgbClr val="64748B"/>
+                </a:solidFill>
+                <a:latin typeface="Calibri" pitchFamily="34" charset="0"/>
+                <a:ea typeface="Calibri" pitchFamily="34" charset="-122"/>
+                <a:cs typeface="Calibri" pitchFamily="34" charset="-120"/>
+              </a:rPr>
+              <a:t>subprocess检测</a:t>
+            </a:r>
+            <a:endParaRPr lang="en-US" sz="700" dirty="0"/>
+          </a:p>
+        </p:txBody>
+      </p:sp>
+      <p:sp>
+        <p:nvSpPr>
+          <p:cNvPr id="26" name="Shape 24"/>
+          <p:cNvSpPr/>
+          <p:nvPr/>
+        </p:nvSpPr>
+        <p:spPr>
+          <a:xfrm>
+            <a:off x="594360" y="2103120"/>
+            <a:ext cx="3840480" cy="2743200"/>
+          </a:xfrm>
+          <a:prstGeom prst="rect">
+            <a:avLst/>
+          </a:prstGeom>
+          <a:solidFill>
+            <a:srgbClr val="FFFFFF"/>
+          </a:solidFill>
+          <a:ln/>
+          <a:effectLst>
+            <a:outerShdw sx="100000" sy="100000" kx="0" ky="0" algn="bl" rotWithShape="0" blurRad="50800" dist="25400" dir="8100000">
+              <a:srgbClr val="000000">
+                <a:alpha val="8000"/>
+              </a:srgbClr>
+            </a:outerShdw>
+          </a:effectLst>
+        </p:spPr>
+      </p:sp>
+      <p:sp>
+        <p:nvSpPr>
           <p:cNvPr id="27" name="Text 25"/>
           <p:cNvSpPr/>
           <p:nvPr/>
         </p:nvSpPr>
         <p:spPr>
           <a:xfrm>
-            <a:off x="868680" y="3200400"/>
-            <a:ext cx="3657600" cy="274320"/>
+            <a:off x="868680" y="2194560"/>
+            <a:ext cx="3291840" cy="274320"/>
           </a:xfrm>
           <a:prstGeom prst="rect">
             <a:avLst/>
@@ -7826,7 +9315,7 @@
                 <a:ea typeface="Calibri" pitchFamily="34" charset="-122"/>
                 <a:cs typeface="Calibri" pitchFamily="34" charset="-120"/>
               </a:rPr>
-              <a:t>典型 Bug 修复案例</a:t>
+              <a:t>路径级安全保护</a:t>
             </a:r>
             <a:endParaRPr lang="en-US" sz="1300" dirty="0"/>
           </a:p>
@@ -7834,34 +9323,196 @@
       </p:sp>
       <p:sp>
         <p:nvSpPr>
-          <p:cNvPr id="28" name="Shape 26"/>
-          <p:cNvSpPr/>
-          <p:nvPr/>
-        </p:nvSpPr>
-        <p:spPr>
-          <a:xfrm>
-            <a:off x="868680" y="3566160"/>
-            <a:ext cx="54864" cy="274320"/>
+          <p:cNvPr id="28" name="Text 26"/>
+          <p:cNvSpPr/>
+          <p:nvPr/>
+        </p:nvSpPr>
+        <p:spPr>
+          <a:xfrm>
+            <a:off x="868680" y="2514600"/>
+            <a:ext cx="3291840" cy="2194560"/>
+          </a:xfrm>
+          <a:prstGeom prst="rect">
+            <a:avLst/>
+          </a:prstGeom>
+          <a:noFill/>
+          <a:ln/>
+        </p:spPr>
+        <p:txBody>
+          <a:bodyPr wrap="square" rtlCol="0" anchor="ctr"/>
+          <a:lstStyle/>
+          <a:p>
+            <a:pPr indent="0" marL="0">
+              <a:spcAft>
+                <a:spcPts val="300"/>
+              </a:spcAft>
+              <a:buNone/>
+            </a:pPr>
+            <a:r>
+              <a:rPr lang="en-US" sz="1000" b="1" dirty="0">
+                <a:solidFill>
+                  <a:srgbClr val="1E293B"/>
+                </a:solidFill>
+                <a:latin typeface="Calibri" pitchFamily="34" charset="0"/>
+                <a:ea typeface="Calibri" pitchFamily="34" charset="-122"/>
+                <a:cs typeface="Calibri" pitchFamily="34" charset="-120"/>
+              </a:rPr>
+              <a:t>写操作 (write/delete/move)</a:t>
+            </a:r>
+            <a:endParaRPr lang="en-US" sz="1000" dirty="0"/>
+          </a:p>
+          <a:p>
+            <a:pPr marL="342900" indent="-342900">
+              <a:buSzPct val="100000"/>
+              <a:buChar char="•"/>
+            </a:pPr>
+            <a:r>
+              <a:rPr lang="en-US" sz="900" dirty="0">
+                <a:solidFill>
+                  <a:srgbClr val="DC2626"/>
+                </a:solidFill>
+                <a:latin typeface="Calibri" pitchFamily="34" charset="0"/>
+                <a:ea typeface="Calibri" pitchFamily="34" charset="-122"/>
+                <a:cs typeface="Calibri" pitchFamily="34" charset="-120"/>
+              </a:rPr>
+              <a:t>系统路径 /etc /boot /bin /sys /proc /dev</a:t>
+            </a:r>
+            <a:endParaRPr lang="en-US" sz="1000" dirty="0"/>
+          </a:p>
+          <a:p>
+            <a:pPr marL="342900" indent="-342900">
+              <a:buSzPct val="100000"/>
+              <a:buChar char="•"/>
+            </a:pPr>
+            <a:r>
+              <a:rPr lang="en-US" sz="900" dirty="0">
+                <a:solidFill>
+                  <a:srgbClr val="DC2626"/>
+                </a:solidFill>
+                <a:latin typeface="Calibri" pitchFamily="34" charset="0"/>
+                <a:ea typeface="Calibri" pitchFamily="34" charset="-122"/>
+                <a:cs typeface="Calibri" pitchFamily="34" charset="-120"/>
+              </a:rPr>
+              <a:t>用户安全 ~/.ssh ~/.gnupg ~/.bashrc</a:t>
+            </a:r>
+            <a:endParaRPr lang="en-US" sz="1000" dirty="0"/>
+          </a:p>
+          <a:p>
+            <a:pPr marL="342900" indent="-342900">
+              <a:spcAft>
+                <a:spcPts val="600"/>
+              </a:spcAft>
+              <a:buSzPct val="100000"/>
+              <a:buChar char="•"/>
+            </a:pPr>
+            <a:r>
+              <a:rPr lang="en-US" sz="900" dirty="0">
+                <a:solidFill>
+                  <a:srgbClr val="059669"/>
+                </a:solidFill>
+                <a:latin typeface="Calibri" pitchFamily="34" charset="0"/>
+                <a:ea typeface="Calibri" pitchFamily="34" charset="-122"/>
+                <a:cs typeface="Calibri" pitchFamily="34" charset="-120"/>
+              </a:rPr>
+              <a:t>普通路径 /home /tmp /var/www /opt</a:t>
+            </a:r>
+            <a:endParaRPr lang="en-US" sz="1000" dirty="0"/>
+          </a:p>
+          <a:p>
+            <a:pPr indent="0" marL="0">
+              <a:spcAft>
+                <a:spcPts val="300"/>
+              </a:spcAft>
+              <a:buNone/>
+            </a:pPr>
+            <a:r>
+              <a:rPr lang="en-US" sz="1000" b="1" dirty="0">
+                <a:solidFill>
+                  <a:srgbClr val="1E293B"/>
+                </a:solidFill>
+                <a:latin typeface="Calibri" pitchFamily="34" charset="0"/>
+                <a:ea typeface="Calibri" pitchFamily="34" charset="-122"/>
+                <a:cs typeface="Calibri" pitchFamily="34" charset="-120"/>
+              </a:rPr>
+              <a:t>读操作 (read_file)</a:t>
+            </a:r>
+            <a:endParaRPr lang="en-US" sz="1000" dirty="0"/>
+          </a:p>
+          <a:p>
+            <a:pPr marL="342900" indent="-342900">
+              <a:buSzPct val="100000"/>
+              <a:buChar char="•"/>
+            </a:pPr>
+            <a:r>
+              <a:rPr lang="en-US" sz="900" dirty="0">
+                <a:solidFill>
+                  <a:srgbClr val="D97706"/>
+                </a:solidFill>
+                <a:latin typeface="Calibri" pitchFamily="34" charset="0"/>
+                <a:ea typeface="Calibri" pitchFamily="34" charset="-122"/>
+                <a:cs typeface="Calibri" pitchFamily="34" charset="-120"/>
+              </a:rPr>
+              <a:t>敏感文件 /etc/shadow ~/.ssh/id_rsa</a:t>
+            </a:r>
+            <a:endParaRPr lang="en-US" sz="1000" dirty="0"/>
+          </a:p>
+          <a:p>
+            <a:pPr marL="342900" indent="-342900">
+              <a:buSzPct val="100000"/>
+              <a:buChar char="•"/>
+            </a:pPr>
+            <a:r>
+              <a:rPr lang="en-US" sz="900" dirty="0">
+                <a:solidFill>
+                  <a:srgbClr val="059669"/>
+                </a:solidFill>
+                <a:latin typeface="Calibri" pitchFamily="34" charset="0"/>
+                <a:ea typeface="Calibri" pitchFamily="34" charset="-122"/>
+                <a:cs typeface="Calibri" pitchFamily="34" charset="-120"/>
+              </a:rPr>
+              <a:t>普通文件 无限制自由读取</a:t>
+            </a:r>
+            <a:endParaRPr lang="en-US" sz="1000" dirty="0"/>
+          </a:p>
+        </p:txBody>
+      </p:sp>
+      <p:sp>
+        <p:nvSpPr>
+          <p:cNvPr id="29" name="Shape 27"/>
+          <p:cNvSpPr/>
+          <p:nvPr/>
+        </p:nvSpPr>
+        <p:spPr>
+          <a:xfrm>
+            <a:off x="4709160" y="2103120"/>
+            <a:ext cx="3840480" cy="2743200"/>
           </a:xfrm>
           <a:prstGeom prst="rect">
             <a:avLst/>
           </a:prstGeom>
           <a:solidFill>
-            <a:srgbClr val="D97706"/>
+            <a:srgbClr val="FFFFFF"/>
           </a:solidFill>
           <a:ln/>
-        </p:spPr>
-      </p:sp>
-      <p:sp>
-        <p:nvSpPr>
-          <p:cNvPr id="29" name="Text 27"/>
-          <p:cNvSpPr/>
-          <p:nvPr/>
-        </p:nvSpPr>
-        <p:spPr>
-          <a:xfrm>
-            <a:off x="1051560" y="3566160"/>
-            <a:ext cx="2011680" cy="274320"/>
+          <a:effectLst>
+            <a:outerShdw sx="100000" sy="100000" kx="0" ky="0" algn="bl" rotWithShape="0" blurRad="50800" dist="25400" dir="8100000">
+              <a:srgbClr val="000000">
+                <a:alpha val="8000"/>
+              </a:srgbClr>
+            </a:outerShdw>
+          </a:effectLst>
+        </p:spPr>
+      </p:sp>
+      <p:sp>
+        <p:nvSpPr>
+          <p:cNvPr id="30" name="Text 28"/>
+          <p:cNvSpPr/>
+          <p:nvPr/>
+        </p:nvSpPr>
+        <p:spPr>
+          <a:xfrm>
+            <a:off x="4983480" y="2194560"/>
+            <a:ext cx="3291840" cy="274320"/>
           </a:xfrm>
           <a:prstGeom prst="rect">
             <a:avLst/>
@@ -7877,6 +9528,48 @@
               <a:buNone/>
             </a:pPr>
             <a:r>
+              <a:rPr lang="en-US" sz="1300" b="1" dirty="0">
+                <a:solidFill>
+                  <a:srgbClr val="028090"/>
+                </a:solidFill>
+                <a:latin typeface="Calibri" pitchFamily="34" charset="0"/>
+                <a:ea typeface="Calibri" pitchFamily="34" charset="-122"/>
+                <a:cs typeface="Calibri" pitchFamily="34" charset="-120"/>
+              </a:rPr>
+              <a:t>命令级安全保护</a:t>
+            </a:r>
+            <a:endParaRPr lang="en-US" sz="1300" dirty="0"/>
+          </a:p>
+        </p:txBody>
+      </p:sp>
+      <p:sp>
+        <p:nvSpPr>
+          <p:cNvPr id="31" name="Text 29"/>
+          <p:cNvSpPr/>
+          <p:nvPr/>
+        </p:nvSpPr>
+        <p:spPr>
+          <a:xfrm>
+            <a:off x="4983480" y="2514600"/>
+            <a:ext cx="3291840" cy="2194560"/>
+          </a:xfrm>
+          <a:prstGeom prst="rect">
+            <a:avLst/>
+          </a:prstGeom>
+          <a:noFill/>
+          <a:ln/>
+        </p:spPr>
+        <p:txBody>
+          <a:bodyPr wrap="square" rtlCol="0" anchor="ctr"/>
+          <a:lstStyle/>
+          <a:p>
+            <a:pPr indent="0" marL="0">
+              <a:spcAft>
+                <a:spcPts val="400"/>
+              </a:spcAft>
+              <a:buNone/>
+            </a:pPr>
+            <a:r>
               <a:rPr lang="en-US" sz="1000" b="1" dirty="0">
                 <a:solidFill>
                   <a:srgbClr val="1E293B"/>
@@ -7885,250 +9578,146 @@
                 <a:ea typeface="Calibri" pitchFamily="34" charset="-122"/>
                 <a:cs typeface="Calibri" pitchFamily="34" charset="-120"/>
               </a:rPr>
-              <a:t>API 超时死循环</a:t>
+              <a:t>Shell 正则检测 (20+ 条规则)</a:t>
             </a:r>
             <a:endParaRPr lang="en-US" sz="1000" dirty="0"/>
           </a:p>
-        </p:txBody>
-      </p:sp>
-      <p:sp>
-        <p:nvSpPr>
-          <p:cNvPr id="30" name="Text 28"/>
-          <p:cNvSpPr/>
-          <p:nvPr/>
-        </p:nvSpPr>
-        <p:spPr>
-          <a:xfrm>
-            <a:off x="3063240" y="3566160"/>
-            <a:ext cx="5212080" cy="274320"/>
-          </a:xfrm>
-          <a:prstGeom prst="rect">
-            <a:avLst/>
-          </a:prstGeom>
-          <a:noFill/>
-          <a:ln/>
-        </p:spPr>
-        <p:txBody>
-          <a:bodyPr wrap="square" lIns="0" tIns="0" rIns="0" bIns="0" rtlCol="0" anchor="ctr"/>
-          <a:lstStyle/>
+          <a:p>
+            <a:pPr marL="342900" indent="-342900">
+              <a:buSzPct val="100000"/>
+              <a:buChar char="•"/>
+            </a:pPr>
+            <a:r>
+              <a:rPr lang="en-US" sz="900" dirty="0">
+                <a:solidFill>
+                  <a:srgbClr val="DC2626"/>
+                </a:solidFill>
+                <a:latin typeface="Calibri" pitchFamily="34" charset="0"/>
+                <a:ea typeface="Calibri" pitchFamily="34" charset="-122"/>
+                <a:cs typeface="Calibri" pitchFamily="34" charset="-120"/>
+              </a:rPr>
+              <a:t>rm -rf /  ·  mkfs ·  dd if=/dev/</a:t>
+            </a:r>
+            <a:endParaRPr lang="en-US" sz="1000" dirty="0"/>
+          </a:p>
+          <a:p>
+            <a:pPr marL="342900" indent="-342900">
+              <a:buSzPct val="100000"/>
+              <a:buChar char="•"/>
+            </a:pPr>
+            <a:r>
+              <a:rPr lang="en-US" sz="900" dirty="0">
+                <a:solidFill>
+                  <a:srgbClr val="DC2626"/>
+                </a:solidFill>
+                <a:latin typeface="Calibri" pitchFamily="34" charset="0"/>
+                <a:ea typeface="Calibri" pitchFamily="34" charset="-122"/>
+                <a:cs typeface="Calibri" pitchFamily="34" charset="-120"/>
+              </a:rPr>
+              <a:t>curl|sh  ·  wget|sh  ·  nc 反弹shell</a:t>
+            </a:r>
+            <a:endParaRPr lang="en-US" sz="1000" dirty="0"/>
+          </a:p>
+          <a:p>
+            <a:pPr marL="342900" indent="-342900">
+              <a:buSzPct val="100000"/>
+              <a:buChar char="•"/>
+            </a:pPr>
+            <a:r>
+              <a:rPr lang="en-US" sz="900" dirty="0">
+                <a:solidFill>
+                  <a:srgbClr val="DC2626"/>
+                </a:solidFill>
+                <a:latin typeface="Calibri" pitchFamily="34" charset="0"/>
+                <a:ea typeface="Calibri" pitchFamily="34" charset="-122"/>
+                <a:cs typeface="Calibri" pitchFamily="34" charset="-120"/>
+              </a:rPr>
+              <a:t>fork 炸弹  ·  systemctl stop ssh</a:t>
+            </a:r>
+            <a:endParaRPr lang="en-US" sz="1000" dirty="0"/>
+          </a:p>
+          <a:p>
+            <a:pPr marL="342900" indent="-342900">
+              <a:spcAft>
+                <a:spcPts val="600"/>
+              </a:spcAft>
+              <a:buSzPct val="100000"/>
+              <a:buChar char="•"/>
+            </a:pPr>
+            <a:r>
+              <a:rPr lang="en-US" sz="900" dirty="0">
+                <a:solidFill>
+                  <a:srgbClr val="D97706"/>
+                </a:solidFill>
+                <a:latin typeface="Calibri" pitchFamily="34" charset="0"/>
+                <a:ea typeface="Calibri" pitchFamily="34" charset="-122"/>
+                <a:cs typeface="Calibri" pitchFamily="34" charset="-120"/>
+              </a:rPr>
+              <a:t>sudo  ·  chmod 777 /  ·  chown -R /</a:t>
+            </a:r>
+            <a:endParaRPr lang="en-US" sz="1000" dirty="0"/>
+          </a:p>
           <a:p>
             <a:pPr indent="0" marL="0">
-              <a:buNone/>
-            </a:pPr>
-            <a:r>
-              <a:rPr lang="en-US" sz="1000" dirty="0">
-                <a:solidFill>
-                  <a:srgbClr val="64748B"/>
-                </a:solidFill>
-                <a:latin typeface="Calibri" pitchFamily="34" charset="0"/>
-                <a:ea typeface="Calibri" pitchFamily="34" charset="-122"/>
-                <a:cs typeface="Calibri" pitchFamily="34" charset="-120"/>
-              </a:rPr>
-              <a:t>退避重试(2s→4s→8s) + 超时错误不污染对话历史</a:t>
+              <a:spcAft>
+                <a:spcPts val="400"/>
+              </a:spcAft>
+              <a:buNone/>
+            </a:pPr>
+            <a:r>
+              <a:rPr lang="en-US" sz="1000" b="1" dirty="0">
+                <a:solidFill>
+                  <a:srgbClr val="1E293B"/>
+                </a:solidFill>
+                <a:latin typeface="Calibri" pitchFamily="34" charset="0"/>
+                <a:ea typeface="Calibri" pitchFamily="34" charset="-122"/>
+                <a:cs typeface="Calibri" pitchFamily="34" charset="-120"/>
+              </a:rPr>
+              <a:t>Python AST 静态分析</a:t>
             </a:r>
             <a:endParaRPr lang="en-US" sz="1000" dirty="0"/>
           </a:p>
-        </p:txBody>
-      </p:sp>
-      <p:sp>
-        <p:nvSpPr>
-          <p:cNvPr id="31" name="Shape 29"/>
-          <p:cNvSpPr/>
-          <p:nvPr/>
-        </p:nvSpPr>
-        <p:spPr>
-          <a:xfrm>
-            <a:off x="868680" y="3950208"/>
-            <a:ext cx="54864" cy="274320"/>
-          </a:xfrm>
-          <a:prstGeom prst="rect">
-            <a:avLst/>
-          </a:prstGeom>
-          <a:solidFill>
-            <a:srgbClr val="D97706"/>
-          </a:solidFill>
-          <a:ln/>
-        </p:spPr>
+          <a:p>
+            <a:pPr marL="342900" indent="-342900">
+              <a:buSzPct val="100000"/>
+              <a:buChar char="•"/>
+            </a:pPr>
+            <a:r>
+              <a:rPr lang="en-US" sz="900" dirty="0">
+                <a:solidFill>
+                  <a:srgbClr val="DC2626"/>
+                </a:solidFill>
+                <a:latin typeface="Calibri" pitchFamily="34" charset="0"/>
+                <a:ea typeface="Calibri" pitchFamily="34" charset="-122"/>
+                <a:cs typeface="Calibri" pitchFamily="34" charset="-120"/>
+              </a:rPr>
+              <a:t>eval() exec() compile() 动态执行</a:t>
+            </a:r>
+            <a:endParaRPr lang="en-US" sz="1000" dirty="0"/>
+          </a:p>
+          <a:p>
+            <a:pPr marL="342900" indent="-342900">
+              <a:buSzPct val="100000"/>
+              <a:buChar char="•"/>
+            </a:pPr>
+            <a:r>
+              <a:rPr lang="en-US" sz="900" dirty="0">
+                <a:solidFill>
+                  <a:srgbClr val="DC2626"/>
+                </a:solidFill>
+                <a:latin typeface="Calibri" pitchFamily="34" charset="0"/>
+                <a:ea typeface="Calibri" pitchFamily="34" charset="-122"/>
+                <a:cs typeface="Calibri" pitchFamily="34" charset="-120"/>
+              </a:rPr>
+              <a:t>os.system() subprocess.run() 危险参数</a:t>
+            </a:r>
+            <a:endParaRPr lang="en-US" sz="1000" dirty="0"/>
+          </a:p>
+        </p:txBody>
       </p:sp>
       <p:sp>
         <p:nvSpPr>
           <p:cNvPr id="32" name="Text 30"/>
-          <p:cNvSpPr/>
-          <p:nvPr/>
-        </p:nvSpPr>
-        <p:spPr>
-          <a:xfrm>
-            <a:off x="1051560" y="3950208"/>
-            <a:ext cx="2011680" cy="274320"/>
-          </a:xfrm>
-          <a:prstGeom prst="rect">
-            <a:avLst/>
-          </a:prstGeom>
-          <a:noFill/>
-          <a:ln/>
-        </p:spPr>
-        <p:txBody>
-          <a:bodyPr wrap="square" lIns="0" tIns="0" rIns="0" bIns="0" rtlCol="0" anchor="ctr"/>
-          <a:lstStyle/>
-          <a:p>
-            <a:pPr indent="0" marL="0">
-              <a:buNone/>
-            </a:pPr>
-            <a:r>
-              <a:rPr lang="en-US" sz="1000" b="1" dirty="0">
-                <a:solidFill>
-                  <a:srgbClr val="1E293B"/>
-                </a:solidFill>
-                <a:latin typeface="Calibri" pitchFamily="34" charset="0"/>
-                <a:ea typeface="Calibri" pitchFamily="34" charset="-122"/>
-                <a:cs typeface="Calibri" pitchFamily="34" charset="-120"/>
-              </a:rPr>
-              <a:t>工作区路径不一致</a:t>
-            </a:r>
-            <a:endParaRPr lang="en-US" sz="1000" dirty="0"/>
-          </a:p>
-        </p:txBody>
-      </p:sp>
-      <p:sp>
-        <p:nvSpPr>
-          <p:cNvPr id="33" name="Text 31"/>
-          <p:cNvSpPr/>
-          <p:nvPr/>
-        </p:nvSpPr>
-        <p:spPr>
-          <a:xfrm>
-            <a:off x="3063240" y="3950208"/>
-            <a:ext cx="5212080" cy="274320"/>
-          </a:xfrm>
-          <a:prstGeom prst="rect">
-            <a:avLst/>
-          </a:prstGeom>
-          <a:noFill/>
-          <a:ln/>
-        </p:spPr>
-        <p:txBody>
-          <a:bodyPr wrap="square" lIns="0" tIns="0" rIns="0" bIns="0" rtlCol="0" anchor="ctr"/>
-          <a:lstStyle/>
-          <a:p>
-            <a:pPr indent="0" marL="0">
-              <a:buNone/>
-            </a:pPr>
-            <a:r>
-              <a:rPr lang="en-US" sz="1000" dirty="0">
-                <a:solidFill>
-                  <a:srgbClr val="64748B"/>
-                </a:solidFill>
-                <a:latin typeface="Calibri" pitchFamily="34" charset="0"/>
-                <a:ea typeface="Calibri" pitchFamily="34" charset="-122"/>
-                <a:cs typeface="Calibri" pitchFamily="34" charset="-120"/>
-              </a:rPr>
-              <a:t>ScriptExecutor 改用 __file__ 相对路径，替代 os.getcwd()</a:t>
-            </a:r>
-            <a:endParaRPr lang="en-US" sz="1000" dirty="0"/>
-          </a:p>
-        </p:txBody>
-      </p:sp>
-      <p:sp>
-        <p:nvSpPr>
-          <p:cNvPr id="34" name="Shape 32"/>
-          <p:cNvSpPr/>
-          <p:nvPr/>
-        </p:nvSpPr>
-        <p:spPr>
-          <a:xfrm>
-            <a:off x="868680" y="4334256"/>
-            <a:ext cx="54864" cy="274320"/>
-          </a:xfrm>
-          <a:prstGeom prst="rect">
-            <a:avLst/>
-          </a:prstGeom>
-          <a:solidFill>
-            <a:srgbClr val="D97706"/>
-          </a:solidFill>
-          <a:ln/>
-        </p:spPr>
-      </p:sp>
-      <p:sp>
-        <p:nvSpPr>
-          <p:cNvPr id="35" name="Text 33"/>
-          <p:cNvSpPr/>
-          <p:nvPr/>
-        </p:nvSpPr>
-        <p:spPr>
-          <a:xfrm>
-            <a:off x="1051560" y="4334256"/>
-            <a:ext cx="2011680" cy="274320"/>
-          </a:xfrm>
-          <a:prstGeom prst="rect">
-            <a:avLst/>
-          </a:prstGeom>
-          <a:noFill/>
-          <a:ln/>
-        </p:spPr>
-        <p:txBody>
-          <a:bodyPr wrap="square" lIns="0" tIns="0" rIns="0" bIns="0" rtlCol="0" anchor="ctr"/>
-          <a:lstStyle/>
-          <a:p>
-            <a:pPr indent="0" marL="0">
-              <a:buNone/>
-            </a:pPr>
-            <a:r>
-              <a:rPr lang="en-US" sz="1000" b="1" dirty="0">
-                <a:solidFill>
-                  <a:srgbClr val="1E293B"/>
-                </a:solidFill>
-                <a:latin typeface="Calibri" pitchFamily="34" charset="0"/>
-                <a:ea typeface="Calibri" pitchFamily="34" charset="-122"/>
-                <a:cs typeface="Calibri" pitchFamily="34" charset="-120"/>
-              </a:rPr>
-              <a:t>delete_file 路径穿越</a:t>
-            </a:r>
-            <a:endParaRPr lang="en-US" sz="1000" dirty="0"/>
-          </a:p>
-        </p:txBody>
-      </p:sp>
-      <p:sp>
-        <p:nvSpPr>
-          <p:cNvPr id="36" name="Text 34"/>
-          <p:cNvSpPr/>
-          <p:nvPr/>
-        </p:nvSpPr>
-        <p:spPr>
-          <a:xfrm>
-            <a:off x="3063240" y="4334256"/>
-            <a:ext cx="5212080" cy="274320"/>
-          </a:xfrm>
-          <a:prstGeom prst="rect">
-            <a:avLst/>
-          </a:prstGeom>
-          <a:noFill/>
-          <a:ln/>
-        </p:spPr>
-        <p:txBody>
-          <a:bodyPr wrap="square" lIns="0" tIns="0" rIns="0" bIns="0" rtlCol="0" anchor="ctr"/>
-          <a:lstStyle/>
-          <a:p>
-            <a:pPr indent="0" marL="0">
-              <a:buNone/>
-            </a:pPr>
-            <a:r>
-              <a:rPr lang="en-US" sz="1000" dirty="0">
-                <a:solidFill>
-                  <a:srgbClr val="64748B"/>
-                </a:solidFill>
-                <a:latin typeface="Calibri" pitchFamily="34" charset="0"/>
-                <a:ea typeface="Calibri" pitchFamily="34" charset="-122"/>
-                <a:cs typeface="Calibri" pitchFamily="34" charset="-120"/>
-              </a:rPr>
-              <a:t>os.path.realpath() + 前缀匹配，拦截 ../ 越界</a:t>
-            </a:r>
-            <a:endParaRPr lang="en-US" sz="1000" dirty="0"/>
-          </a:p>
-        </p:txBody>
-      </p:sp>
-      <p:sp>
-        <p:nvSpPr>
-          <p:cNvPr id="37" name="Text 35"/>
           <p:cNvSpPr/>
           <p:nvPr/>
         </p:nvSpPr>
@@ -8250,7 +9839,7 @@
                 <a:ea typeface="Cambria" pitchFamily="34" charset="-122"/>
                 <a:cs typeface="Cambria" pitchFamily="34" charset="-120"/>
               </a:rPr>
-              <a:t>开发过程与版本迭代</a:t>
+              <a:t>测试与验证</a:t>
             </a:r>
             <a:endParaRPr lang="en-US" sz="2800" dirty="0"/>
           </a:p>
@@ -8309,6 +9898,1287 @@
                 <a:ea typeface="Calibri" pitchFamily="34" charset="-122"/>
                 <a:cs typeface="Calibri" pitchFamily="34" charset="-120"/>
               </a:rPr>
+              <a:t>4 个测试套件 · 覆盖功能/异常/边界/安全</a:t>
+            </a:r>
+            <a:endParaRPr lang="en-US" sz="1200" dirty="0"/>
+          </a:p>
+        </p:txBody>
+      </p:sp>
+      <p:sp>
+        <p:nvSpPr>
+          <p:cNvPr id="6" name="Shape 4"/>
+          <p:cNvSpPr/>
+          <p:nvPr/>
+        </p:nvSpPr>
+        <p:spPr>
+          <a:xfrm>
+            <a:off x="594360" y="1143000"/>
+            <a:ext cx="1874520" cy="1691640"/>
+          </a:xfrm>
+          <a:prstGeom prst="rect">
+            <a:avLst/>
+          </a:prstGeom>
+          <a:solidFill>
+            <a:srgbClr val="FFFFFF"/>
+          </a:solidFill>
+          <a:ln/>
+          <a:effectLst>
+            <a:outerShdw sx="100000" sy="100000" kx="0" ky="0" algn="bl" rotWithShape="0" blurRad="50800" dist="25400" dir="8100000">
+              <a:srgbClr val="000000">
+                <a:alpha val="8000"/>
+              </a:srgbClr>
+            </a:outerShdw>
+          </a:effectLst>
+        </p:spPr>
+      </p:sp>
+      <p:sp>
+        <p:nvSpPr>
+          <p:cNvPr id="7" name="Text 5"/>
+          <p:cNvSpPr/>
+          <p:nvPr/>
+        </p:nvSpPr>
+        <p:spPr>
+          <a:xfrm>
+            <a:off x="731520" y="1216152"/>
+            <a:ext cx="1600200" cy="274320"/>
+          </a:xfrm>
+          <a:prstGeom prst="rect">
+            <a:avLst/>
+          </a:prstGeom>
+          <a:noFill/>
+          <a:ln/>
+        </p:spPr>
+        <p:txBody>
+          <a:bodyPr wrap="square" lIns="0" tIns="0" rIns="0" bIns="0" rtlCol="0" anchor="ctr"/>
+          <a:lstStyle/>
+          <a:p>
+            <a:pPr indent="0" marL="0">
+              <a:buNone/>
+            </a:pPr>
+            <a:r>
+              <a:rPr lang="en-US" sz="1300" b="1" dirty="0">
+                <a:solidFill>
+                  <a:srgbClr val="028090"/>
+                </a:solidFill>
+                <a:latin typeface="Calibri" pitchFamily="34" charset="0"/>
+                <a:ea typeface="Calibri" pitchFamily="34" charset="-122"/>
+                <a:cs typeface="Calibri" pitchFamily="34" charset="-120"/>
+              </a:rPr>
+              <a:t>功能测试</a:t>
+            </a:r>
+            <a:endParaRPr lang="en-US" sz="1300" dirty="0"/>
+          </a:p>
+        </p:txBody>
+      </p:sp>
+      <p:sp>
+        <p:nvSpPr>
+          <p:cNvPr id="8" name="Text 6"/>
+          <p:cNvSpPr/>
+          <p:nvPr/>
+        </p:nvSpPr>
+        <p:spPr>
+          <a:xfrm>
+            <a:off x="731520" y="1463040"/>
+            <a:ext cx="914400" cy="365760"/>
+          </a:xfrm>
+          <a:prstGeom prst="rect">
+            <a:avLst/>
+          </a:prstGeom>
+          <a:noFill/>
+          <a:ln/>
+        </p:spPr>
+        <p:txBody>
+          <a:bodyPr wrap="square" lIns="0" tIns="0" rIns="0" bIns="0" rtlCol="0" anchor="ctr"/>
+          <a:lstStyle/>
+          <a:p>
+            <a:pPr indent="0" marL="0">
+              <a:buNone/>
+            </a:pPr>
+            <a:r>
+              <a:rPr lang="en-US" sz="2200" b="1" dirty="0">
+                <a:solidFill>
+                  <a:srgbClr val="1E293B"/>
+                </a:solidFill>
+                <a:latin typeface="Cambria" pitchFamily="34" charset="0"/>
+                <a:ea typeface="Cambria" pitchFamily="34" charset="-122"/>
+                <a:cs typeface="Cambria" pitchFamily="34" charset="-120"/>
+              </a:rPr>
+              <a:t>7项</a:t>
+            </a:r>
+            <a:endParaRPr lang="en-US" sz="2200" dirty="0"/>
+          </a:p>
+        </p:txBody>
+      </p:sp>
+      <p:sp>
+        <p:nvSpPr>
+          <p:cNvPr id="9" name="Text 7"/>
+          <p:cNvSpPr/>
+          <p:nvPr/>
+        </p:nvSpPr>
+        <p:spPr>
+          <a:xfrm>
+            <a:off x="1600200" y="1536192"/>
+            <a:ext cx="731520" cy="228600"/>
+          </a:xfrm>
+          <a:prstGeom prst="rect">
+            <a:avLst/>
+          </a:prstGeom>
+          <a:noFill/>
+          <a:ln/>
+        </p:spPr>
+        <p:txBody>
+          <a:bodyPr wrap="square" lIns="0" tIns="0" rIns="0" bIns="0" rtlCol="0" anchor="ctr"/>
+          <a:lstStyle/>
+          <a:p>
+            <a:pPr indent="0" marL="0">
+              <a:buNone/>
+            </a:pPr>
+            <a:r>
+              <a:rPr lang="en-US" sz="900" dirty="0">
+                <a:solidFill>
+                  <a:srgbClr val="059669"/>
+                </a:solidFill>
+                <a:latin typeface="Calibri" pitchFamily="34" charset="0"/>
+                <a:ea typeface="Calibri" pitchFamily="34" charset="-122"/>
+                <a:cs typeface="Calibri" pitchFamily="34" charset="-120"/>
+              </a:rPr>
+              <a:t>全部通过</a:t>
+            </a:r>
+            <a:endParaRPr lang="en-US" sz="900" dirty="0"/>
+          </a:p>
+        </p:txBody>
+      </p:sp>
+      <p:sp>
+        <p:nvSpPr>
+          <p:cNvPr id="10" name="Text 8"/>
+          <p:cNvSpPr/>
+          <p:nvPr/>
+        </p:nvSpPr>
+        <p:spPr>
+          <a:xfrm>
+            <a:off x="731520" y="1920240"/>
+            <a:ext cx="1600200" cy="731520"/>
+          </a:xfrm>
+          <a:prstGeom prst="rect">
+            <a:avLst/>
+          </a:prstGeom>
+          <a:noFill/>
+          <a:ln/>
+        </p:spPr>
+        <p:txBody>
+          <a:bodyPr wrap="square" rtlCol="0" anchor="ctr"/>
+          <a:lstStyle/>
+          <a:p>
+            <a:pPr indent="0" marL="0">
+              <a:buNone/>
+            </a:pPr>
+            <a:r>
+              <a:rPr lang="en-US" sz="800" dirty="0">
+                <a:solidFill>
+                  <a:srgbClr val="64748B"/>
+                </a:solidFill>
+                <a:latin typeface="Calibri" pitchFamily="34" charset="0"/>
+                <a:ea typeface="Calibri" pitchFamily="34" charset="-122"/>
+                <a:cs typeface="Calibri" pitchFamily="34" charset="-120"/>
+              </a:rPr>
+              <a:t>文件CRUD · 系统信息 · 多轮对话 · 文件分类</a:t>
+            </a:r>
+            <a:endParaRPr lang="en-US" sz="800" dirty="0"/>
+          </a:p>
+        </p:txBody>
+      </p:sp>
+      <p:sp>
+        <p:nvSpPr>
+          <p:cNvPr id="11" name="Shape 9"/>
+          <p:cNvSpPr/>
+          <p:nvPr/>
+        </p:nvSpPr>
+        <p:spPr>
+          <a:xfrm>
+            <a:off x="2651760" y="1143000"/>
+            <a:ext cx="1874520" cy="1691640"/>
+          </a:xfrm>
+          <a:prstGeom prst="rect">
+            <a:avLst/>
+          </a:prstGeom>
+          <a:solidFill>
+            <a:srgbClr val="FFFFFF"/>
+          </a:solidFill>
+          <a:ln/>
+          <a:effectLst>
+            <a:outerShdw sx="100000" sy="100000" kx="0" ky="0" algn="bl" rotWithShape="0" blurRad="50800" dist="25400" dir="8100000">
+              <a:srgbClr val="000000">
+                <a:alpha val="8000"/>
+              </a:srgbClr>
+            </a:outerShdw>
+          </a:effectLst>
+        </p:spPr>
+      </p:sp>
+      <p:sp>
+        <p:nvSpPr>
+          <p:cNvPr id="12" name="Text 10"/>
+          <p:cNvSpPr/>
+          <p:nvPr/>
+        </p:nvSpPr>
+        <p:spPr>
+          <a:xfrm>
+            <a:off x="2788920" y="1216152"/>
+            <a:ext cx="1600200" cy="274320"/>
+          </a:xfrm>
+          <a:prstGeom prst="rect">
+            <a:avLst/>
+          </a:prstGeom>
+          <a:noFill/>
+          <a:ln/>
+        </p:spPr>
+        <p:txBody>
+          <a:bodyPr wrap="square" lIns="0" tIns="0" rIns="0" bIns="0" rtlCol="0" anchor="ctr"/>
+          <a:lstStyle/>
+          <a:p>
+            <a:pPr indent="0" marL="0">
+              <a:buNone/>
+            </a:pPr>
+            <a:r>
+              <a:rPr lang="en-US" sz="1300" b="1" dirty="0">
+                <a:solidFill>
+                  <a:srgbClr val="028090"/>
+                </a:solidFill>
+                <a:latin typeface="Calibri" pitchFamily="34" charset="0"/>
+                <a:ea typeface="Calibri" pitchFamily="34" charset="-122"/>
+                <a:cs typeface="Calibri" pitchFamily="34" charset="-120"/>
+              </a:rPr>
+              <a:t>异常测试</a:t>
+            </a:r>
+            <a:endParaRPr lang="en-US" sz="1300" dirty="0"/>
+          </a:p>
+        </p:txBody>
+      </p:sp>
+      <p:sp>
+        <p:nvSpPr>
+          <p:cNvPr id="13" name="Text 11"/>
+          <p:cNvSpPr/>
+          <p:nvPr/>
+        </p:nvSpPr>
+        <p:spPr>
+          <a:xfrm>
+            <a:off x="2788920" y="1463040"/>
+            <a:ext cx="914400" cy="365760"/>
+          </a:xfrm>
+          <a:prstGeom prst="rect">
+            <a:avLst/>
+          </a:prstGeom>
+          <a:noFill/>
+          <a:ln/>
+        </p:spPr>
+        <p:txBody>
+          <a:bodyPr wrap="square" lIns="0" tIns="0" rIns="0" bIns="0" rtlCol="0" anchor="ctr"/>
+          <a:lstStyle/>
+          <a:p>
+            <a:pPr indent="0" marL="0">
+              <a:buNone/>
+            </a:pPr>
+            <a:r>
+              <a:rPr lang="en-US" sz="2200" b="1" dirty="0">
+                <a:solidFill>
+                  <a:srgbClr val="1E293B"/>
+                </a:solidFill>
+                <a:latin typeface="Cambria" pitchFamily="34" charset="0"/>
+                <a:ea typeface="Cambria" pitchFamily="34" charset="-122"/>
+                <a:cs typeface="Cambria" pitchFamily="34" charset="-120"/>
+              </a:rPr>
+              <a:t>5项</a:t>
+            </a:r>
+            <a:endParaRPr lang="en-US" sz="2200" dirty="0"/>
+          </a:p>
+        </p:txBody>
+      </p:sp>
+      <p:sp>
+        <p:nvSpPr>
+          <p:cNvPr id="14" name="Text 12"/>
+          <p:cNvSpPr/>
+          <p:nvPr/>
+        </p:nvSpPr>
+        <p:spPr>
+          <a:xfrm>
+            <a:off x="3657600" y="1536192"/>
+            <a:ext cx="731520" cy="228600"/>
+          </a:xfrm>
+          <a:prstGeom prst="rect">
+            <a:avLst/>
+          </a:prstGeom>
+          <a:noFill/>
+          <a:ln/>
+        </p:spPr>
+        <p:txBody>
+          <a:bodyPr wrap="square" lIns="0" tIns="0" rIns="0" bIns="0" rtlCol="0" anchor="ctr"/>
+          <a:lstStyle/>
+          <a:p>
+            <a:pPr indent="0" marL="0">
+              <a:buNone/>
+            </a:pPr>
+            <a:r>
+              <a:rPr lang="en-US" sz="900" dirty="0">
+                <a:solidFill>
+                  <a:srgbClr val="059669"/>
+                </a:solidFill>
+                <a:latin typeface="Calibri" pitchFamily="34" charset="0"/>
+                <a:ea typeface="Calibri" pitchFamily="34" charset="-122"/>
+                <a:cs typeface="Calibri" pitchFamily="34" charset="-120"/>
+              </a:rPr>
+              <a:t>全部通过</a:t>
+            </a:r>
+            <a:endParaRPr lang="en-US" sz="900" dirty="0"/>
+          </a:p>
+        </p:txBody>
+      </p:sp>
+      <p:sp>
+        <p:nvSpPr>
+          <p:cNvPr id="15" name="Text 13"/>
+          <p:cNvSpPr/>
+          <p:nvPr/>
+        </p:nvSpPr>
+        <p:spPr>
+          <a:xfrm>
+            <a:off x="2788920" y="1920240"/>
+            <a:ext cx="1600200" cy="731520"/>
+          </a:xfrm>
+          <a:prstGeom prst="rect">
+            <a:avLst/>
+          </a:prstGeom>
+          <a:noFill/>
+          <a:ln/>
+        </p:spPr>
+        <p:txBody>
+          <a:bodyPr wrap="square" rtlCol="0" anchor="ctr"/>
+          <a:lstStyle/>
+          <a:p>
+            <a:pPr indent="0" marL="0">
+              <a:buNone/>
+            </a:pPr>
+            <a:r>
+              <a:rPr lang="en-US" sz="800" dirty="0">
+                <a:solidFill>
+                  <a:srgbClr val="64748B"/>
+                </a:solidFill>
+                <a:latin typeface="Calibri" pitchFamily="34" charset="0"/>
+                <a:ea typeface="Calibri" pitchFamily="34" charset="-122"/>
+                <a:cs typeface="Calibri" pitchFamily="34" charset="-120"/>
+              </a:rPr>
+              <a:t>文件不存在 · 权限不足 · 网络断开 · 语法错误</a:t>
+            </a:r>
+            <a:endParaRPr lang="en-US" sz="800" dirty="0"/>
+          </a:p>
+        </p:txBody>
+      </p:sp>
+      <p:sp>
+        <p:nvSpPr>
+          <p:cNvPr id="16" name="Shape 14"/>
+          <p:cNvSpPr/>
+          <p:nvPr/>
+        </p:nvSpPr>
+        <p:spPr>
+          <a:xfrm>
+            <a:off x="4709160" y="1143000"/>
+            <a:ext cx="1874520" cy="1691640"/>
+          </a:xfrm>
+          <a:prstGeom prst="rect">
+            <a:avLst/>
+          </a:prstGeom>
+          <a:solidFill>
+            <a:srgbClr val="FFFFFF"/>
+          </a:solidFill>
+          <a:ln/>
+          <a:effectLst>
+            <a:outerShdw sx="100000" sy="100000" kx="0" ky="0" algn="bl" rotWithShape="0" blurRad="50800" dist="25400" dir="8100000">
+              <a:srgbClr val="000000">
+                <a:alpha val="8000"/>
+              </a:srgbClr>
+            </a:outerShdw>
+          </a:effectLst>
+        </p:spPr>
+      </p:sp>
+      <p:sp>
+        <p:nvSpPr>
+          <p:cNvPr id="17" name="Text 15"/>
+          <p:cNvSpPr/>
+          <p:nvPr/>
+        </p:nvSpPr>
+        <p:spPr>
+          <a:xfrm>
+            <a:off x="4846320" y="1216152"/>
+            <a:ext cx="1600200" cy="274320"/>
+          </a:xfrm>
+          <a:prstGeom prst="rect">
+            <a:avLst/>
+          </a:prstGeom>
+          <a:noFill/>
+          <a:ln/>
+        </p:spPr>
+        <p:txBody>
+          <a:bodyPr wrap="square" lIns="0" tIns="0" rIns="0" bIns="0" rtlCol="0" anchor="ctr"/>
+          <a:lstStyle/>
+          <a:p>
+            <a:pPr indent="0" marL="0">
+              <a:buNone/>
+            </a:pPr>
+            <a:r>
+              <a:rPr lang="en-US" sz="1300" b="1" dirty="0">
+                <a:solidFill>
+                  <a:srgbClr val="028090"/>
+                </a:solidFill>
+                <a:latin typeface="Calibri" pitchFamily="34" charset="0"/>
+                <a:ea typeface="Calibri" pitchFamily="34" charset="-122"/>
+                <a:cs typeface="Calibri" pitchFamily="34" charset="-120"/>
+              </a:rPr>
+              <a:t>边界测试</a:t>
+            </a:r>
+            <a:endParaRPr lang="en-US" sz="1300" dirty="0"/>
+          </a:p>
+        </p:txBody>
+      </p:sp>
+      <p:sp>
+        <p:nvSpPr>
+          <p:cNvPr id="18" name="Text 16"/>
+          <p:cNvSpPr/>
+          <p:nvPr/>
+        </p:nvSpPr>
+        <p:spPr>
+          <a:xfrm>
+            <a:off x="4846320" y="1463040"/>
+            <a:ext cx="914400" cy="365760"/>
+          </a:xfrm>
+          <a:prstGeom prst="rect">
+            <a:avLst/>
+          </a:prstGeom>
+          <a:noFill/>
+          <a:ln/>
+        </p:spPr>
+        <p:txBody>
+          <a:bodyPr wrap="square" lIns="0" tIns="0" rIns="0" bIns="0" rtlCol="0" anchor="ctr"/>
+          <a:lstStyle/>
+          <a:p>
+            <a:pPr indent="0" marL="0">
+              <a:buNone/>
+            </a:pPr>
+            <a:r>
+              <a:rPr lang="en-US" sz="2200" b="1" dirty="0">
+                <a:solidFill>
+                  <a:srgbClr val="1E293B"/>
+                </a:solidFill>
+                <a:latin typeface="Cambria" pitchFamily="34" charset="0"/>
+                <a:ea typeface="Cambria" pitchFamily="34" charset="-122"/>
+                <a:cs typeface="Cambria" pitchFamily="34" charset="-120"/>
+              </a:rPr>
+              <a:t>4项</a:t>
+            </a:r>
+            <a:endParaRPr lang="en-US" sz="2200" dirty="0"/>
+          </a:p>
+        </p:txBody>
+      </p:sp>
+      <p:sp>
+        <p:nvSpPr>
+          <p:cNvPr id="19" name="Text 17"/>
+          <p:cNvSpPr/>
+          <p:nvPr/>
+        </p:nvSpPr>
+        <p:spPr>
+          <a:xfrm>
+            <a:off x="5715000" y="1536192"/>
+            <a:ext cx="731520" cy="228600"/>
+          </a:xfrm>
+          <a:prstGeom prst="rect">
+            <a:avLst/>
+          </a:prstGeom>
+          <a:noFill/>
+          <a:ln/>
+        </p:spPr>
+        <p:txBody>
+          <a:bodyPr wrap="square" lIns="0" tIns="0" rIns="0" bIns="0" rtlCol="0" anchor="ctr"/>
+          <a:lstStyle/>
+          <a:p>
+            <a:pPr indent="0" marL="0">
+              <a:buNone/>
+            </a:pPr>
+            <a:r>
+              <a:rPr lang="en-US" sz="900" dirty="0">
+                <a:solidFill>
+                  <a:srgbClr val="059669"/>
+                </a:solidFill>
+                <a:latin typeface="Calibri" pitchFamily="34" charset="0"/>
+                <a:ea typeface="Calibri" pitchFamily="34" charset="-122"/>
+                <a:cs typeface="Calibri" pitchFamily="34" charset="-120"/>
+              </a:rPr>
+              <a:t>全部通过</a:t>
+            </a:r>
+            <a:endParaRPr lang="en-US" sz="900" dirty="0"/>
+          </a:p>
+        </p:txBody>
+      </p:sp>
+      <p:sp>
+        <p:nvSpPr>
+          <p:cNvPr id="20" name="Text 18"/>
+          <p:cNvSpPr/>
+          <p:nvPr/>
+        </p:nvSpPr>
+        <p:spPr>
+          <a:xfrm>
+            <a:off x="4846320" y="1920240"/>
+            <a:ext cx="1600200" cy="731520"/>
+          </a:xfrm>
+          <a:prstGeom prst="rect">
+            <a:avLst/>
+          </a:prstGeom>
+          <a:noFill/>
+          <a:ln/>
+        </p:spPr>
+        <p:txBody>
+          <a:bodyPr wrap="square" rtlCol="0" anchor="ctr"/>
+          <a:lstStyle/>
+          <a:p>
+            <a:pPr indent="0" marL="0">
+              <a:buNone/>
+            </a:pPr>
+            <a:r>
+              <a:rPr lang="en-US" sz="800" dirty="0">
+                <a:solidFill>
+                  <a:srgbClr val="64748B"/>
+                </a:solidFill>
+                <a:latin typeface="Calibri" pitchFamily="34" charset="0"/>
+                <a:ea typeface="Calibri" pitchFamily="34" charset="-122"/>
+                <a:cs typeface="Calibri" pitchFamily="34" charset="-120"/>
+              </a:rPr>
+              <a:t>3s超时控制 · 空文件 · 10MB截断 · 中文路径</a:t>
+            </a:r>
+            <a:endParaRPr lang="en-US" sz="800" dirty="0"/>
+          </a:p>
+        </p:txBody>
+      </p:sp>
+      <p:sp>
+        <p:nvSpPr>
+          <p:cNvPr id="21" name="Shape 19"/>
+          <p:cNvSpPr/>
+          <p:nvPr/>
+        </p:nvSpPr>
+        <p:spPr>
+          <a:xfrm>
+            <a:off x="6766560" y="1143000"/>
+            <a:ext cx="1874520" cy="1691640"/>
+          </a:xfrm>
+          <a:prstGeom prst="rect">
+            <a:avLst/>
+          </a:prstGeom>
+          <a:solidFill>
+            <a:srgbClr val="FFFFFF"/>
+          </a:solidFill>
+          <a:ln/>
+          <a:effectLst>
+            <a:outerShdw sx="100000" sy="100000" kx="0" ky="0" algn="bl" rotWithShape="0" blurRad="50800" dist="25400" dir="8100000">
+              <a:srgbClr val="000000">
+                <a:alpha val="8000"/>
+              </a:srgbClr>
+            </a:outerShdw>
+          </a:effectLst>
+        </p:spPr>
+      </p:sp>
+      <p:sp>
+        <p:nvSpPr>
+          <p:cNvPr id="22" name="Text 20"/>
+          <p:cNvSpPr/>
+          <p:nvPr/>
+        </p:nvSpPr>
+        <p:spPr>
+          <a:xfrm>
+            <a:off x="6903720" y="1216152"/>
+            <a:ext cx="1600200" cy="274320"/>
+          </a:xfrm>
+          <a:prstGeom prst="rect">
+            <a:avLst/>
+          </a:prstGeom>
+          <a:noFill/>
+          <a:ln/>
+        </p:spPr>
+        <p:txBody>
+          <a:bodyPr wrap="square" lIns="0" tIns="0" rIns="0" bIns="0" rtlCol="0" anchor="ctr"/>
+          <a:lstStyle/>
+          <a:p>
+            <a:pPr indent="0" marL="0">
+              <a:buNone/>
+            </a:pPr>
+            <a:r>
+              <a:rPr lang="en-US" sz="1300" b="1" dirty="0">
+                <a:solidFill>
+                  <a:srgbClr val="028090"/>
+                </a:solidFill>
+                <a:latin typeface="Calibri" pitchFamily="34" charset="0"/>
+                <a:ea typeface="Calibri" pitchFamily="34" charset="-122"/>
+                <a:cs typeface="Calibri" pitchFamily="34" charset="-120"/>
+              </a:rPr>
+              <a:t>安全测试</a:t>
+            </a:r>
+            <a:endParaRPr lang="en-US" sz="1300" dirty="0"/>
+          </a:p>
+        </p:txBody>
+      </p:sp>
+      <p:sp>
+        <p:nvSpPr>
+          <p:cNvPr id="23" name="Text 21"/>
+          <p:cNvSpPr/>
+          <p:nvPr/>
+        </p:nvSpPr>
+        <p:spPr>
+          <a:xfrm>
+            <a:off x="6903720" y="1463040"/>
+            <a:ext cx="914400" cy="365760"/>
+          </a:xfrm>
+          <a:prstGeom prst="rect">
+            <a:avLst/>
+          </a:prstGeom>
+          <a:noFill/>
+          <a:ln/>
+        </p:spPr>
+        <p:txBody>
+          <a:bodyPr wrap="square" lIns="0" tIns="0" rIns="0" bIns="0" rtlCol="0" anchor="ctr"/>
+          <a:lstStyle/>
+          <a:p>
+            <a:pPr indent="0" marL="0">
+              <a:buNone/>
+            </a:pPr>
+            <a:r>
+              <a:rPr lang="en-US" sz="2200" b="1" dirty="0">
+                <a:solidFill>
+                  <a:srgbClr val="1E293B"/>
+                </a:solidFill>
+                <a:latin typeface="Cambria" pitchFamily="34" charset="0"/>
+                <a:ea typeface="Cambria" pitchFamily="34" charset="-122"/>
+                <a:cs typeface="Cambria" pitchFamily="34" charset="-120"/>
+              </a:rPr>
+              <a:t>10+项</a:t>
+            </a:r>
+            <a:endParaRPr lang="en-US" sz="2200" dirty="0"/>
+          </a:p>
+        </p:txBody>
+      </p:sp>
+      <p:sp>
+        <p:nvSpPr>
+          <p:cNvPr id="24" name="Text 22"/>
+          <p:cNvSpPr/>
+          <p:nvPr/>
+        </p:nvSpPr>
+        <p:spPr>
+          <a:xfrm>
+            <a:off x="7772400" y="1536192"/>
+            <a:ext cx="731520" cy="228600"/>
+          </a:xfrm>
+          <a:prstGeom prst="rect">
+            <a:avLst/>
+          </a:prstGeom>
+          <a:noFill/>
+          <a:ln/>
+        </p:spPr>
+        <p:txBody>
+          <a:bodyPr wrap="square" lIns="0" tIns="0" rIns="0" bIns="0" rtlCol="0" anchor="ctr"/>
+          <a:lstStyle/>
+          <a:p>
+            <a:pPr indent="0" marL="0">
+              <a:buNone/>
+            </a:pPr>
+            <a:r>
+              <a:rPr lang="en-US" sz="900" dirty="0">
+                <a:solidFill>
+                  <a:srgbClr val="059669"/>
+                </a:solidFill>
+                <a:latin typeface="Calibri" pitchFamily="34" charset="0"/>
+                <a:ea typeface="Calibri" pitchFamily="34" charset="-122"/>
+                <a:cs typeface="Calibri" pitchFamily="34" charset="-120"/>
+              </a:rPr>
+              <a:t>全部拦截</a:t>
+            </a:r>
+            <a:endParaRPr lang="en-US" sz="900" dirty="0"/>
+          </a:p>
+        </p:txBody>
+      </p:sp>
+      <p:sp>
+        <p:nvSpPr>
+          <p:cNvPr id="25" name="Text 23"/>
+          <p:cNvSpPr/>
+          <p:nvPr/>
+        </p:nvSpPr>
+        <p:spPr>
+          <a:xfrm>
+            <a:off x="6903720" y="1920240"/>
+            <a:ext cx="1600200" cy="731520"/>
+          </a:xfrm>
+          <a:prstGeom prst="rect">
+            <a:avLst/>
+          </a:prstGeom>
+          <a:noFill/>
+          <a:ln/>
+        </p:spPr>
+        <p:txBody>
+          <a:bodyPr wrap="square" rtlCol="0" anchor="ctr"/>
+          <a:lstStyle/>
+          <a:p>
+            <a:pPr indent="0" marL="0">
+              <a:buNone/>
+            </a:pPr>
+            <a:r>
+              <a:rPr lang="en-US" sz="800" dirty="0">
+                <a:solidFill>
+                  <a:srgbClr val="64748B"/>
+                </a:solidFill>
+                <a:latin typeface="Calibri" pitchFamily="34" charset="0"/>
+                <a:ea typeface="Calibri" pitchFamily="34" charset="-122"/>
+                <a:cs typeface="Calibri" pitchFamily="34" charset="-120"/>
+              </a:rPr>
+              <a:t>Shell危险命令 · 路径保护 · AST分析 · 用户敏感路径</a:t>
+            </a:r>
+            <a:endParaRPr lang="en-US" sz="800" dirty="0"/>
+          </a:p>
+        </p:txBody>
+      </p:sp>
+      <p:sp>
+        <p:nvSpPr>
+          <p:cNvPr id="26" name="Shape 24"/>
+          <p:cNvSpPr/>
+          <p:nvPr/>
+        </p:nvSpPr>
+        <p:spPr>
+          <a:xfrm>
+            <a:off x="594360" y="3108960"/>
+            <a:ext cx="7955280" cy="1691640"/>
+          </a:xfrm>
+          <a:prstGeom prst="rect">
+            <a:avLst/>
+          </a:prstGeom>
+          <a:solidFill>
+            <a:srgbClr val="F1F5F9"/>
+          </a:solidFill>
+          <a:ln/>
+          <a:effectLst>
+            <a:outerShdw sx="100000" sy="100000" kx="0" ky="0" algn="bl" rotWithShape="0" blurRad="50800" dist="25400" dir="8100000">
+              <a:srgbClr val="000000">
+                <a:alpha val="8000"/>
+              </a:srgbClr>
+            </a:outerShdw>
+          </a:effectLst>
+        </p:spPr>
+      </p:sp>
+      <p:sp>
+        <p:nvSpPr>
+          <p:cNvPr id="27" name="Text 25"/>
+          <p:cNvSpPr/>
+          <p:nvPr/>
+        </p:nvSpPr>
+        <p:spPr>
+          <a:xfrm>
+            <a:off x="868680" y="3200400"/>
+            <a:ext cx="3657600" cy="274320"/>
+          </a:xfrm>
+          <a:prstGeom prst="rect">
+            <a:avLst/>
+          </a:prstGeom>
+          <a:noFill/>
+          <a:ln/>
+        </p:spPr>
+        <p:txBody>
+          <a:bodyPr wrap="square" lIns="0" tIns="0" rIns="0" bIns="0" rtlCol="0" anchor="ctr"/>
+          <a:lstStyle/>
+          <a:p>
+            <a:pPr indent="0" marL="0">
+              <a:buNone/>
+            </a:pPr>
+            <a:r>
+              <a:rPr lang="en-US" sz="1300" b="1" dirty="0">
+                <a:solidFill>
+                  <a:srgbClr val="028090"/>
+                </a:solidFill>
+                <a:latin typeface="Calibri" pitchFamily="34" charset="0"/>
+                <a:ea typeface="Calibri" pitchFamily="34" charset="-122"/>
+                <a:cs typeface="Calibri" pitchFamily="34" charset="-120"/>
+              </a:rPr>
+              <a:t>典型 Bug 修复案例</a:t>
+            </a:r>
+            <a:endParaRPr lang="en-US" sz="1300" dirty="0"/>
+          </a:p>
+        </p:txBody>
+      </p:sp>
+      <p:sp>
+        <p:nvSpPr>
+          <p:cNvPr id="28" name="Shape 26"/>
+          <p:cNvSpPr/>
+          <p:nvPr/>
+        </p:nvSpPr>
+        <p:spPr>
+          <a:xfrm>
+            <a:off x="868680" y="3566160"/>
+            <a:ext cx="54864" cy="274320"/>
+          </a:xfrm>
+          <a:prstGeom prst="rect">
+            <a:avLst/>
+          </a:prstGeom>
+          <a:solidFill>
+            <a:srgbClr val="D97706"/>
+          </a:solidFill>
+          <a:ln/>
+        </p:spPr>
+      </p:sp>
+      <p:sp>
+        <p:nvSpPr>
+          <p:cNvPr id="29" name="Text 27"/>
+          <p:cNvSpPr/>
+          <p:nvPr/>
+        </p:nvSpPr>
+        <p:spPr>
+          <a:xfrm>
+            <a:off x="1051560" y="3566160"/>
+            <a:ext cx="2011680" cy="274320"/>
+          </a:xfrm>
+          <a:prstGeom prst="rect">
+            <a:avLst/>
+          </a:prstGeom>
+          <a:noFill/>
+          <a:ln/>
+        </p:spPr>
+        <p:txBody>
+          <a:bodyPr wrap="square" lIns="0" tIns="0" rIns="0" bIns="0" rtlCol="0" anchor="ctr"/>
+          <a:lstStyle/>
+          <a:p>
+            <a:pPr indent="0" marL="0">
+              <a:buNone/>
+            </a:pPr>
+            <a:r>
+              <a:rPr lang="en-US" sz="1000" b="1" dirty="0">
+                <a:solidFill>
+                  <a:srgbClr val="1E293B"/>
+                </a:solidFill>
+                <a:latin typeface="Calibri" pitchFamily="34" charset="0"/>
+                <a:ea typeface="Calibri" pitchFamily="34" charset="-122"/>
+                <a:cs typeface="Calibri" pitchFamily="34" charset="-120"/>
+              </a:rPr>
+              <a:t>Sandbox 放开后安全</a:t>
+            </a:r>
+            <a:endParaRPr lang="en-US" sz="1000" dirty="0"/>
+          </a:p>
+        </p:txBody>
+      </p:sp>
+      <p:sp>
+        <p:nvSpPr>
+          <p:cNvPr id="30" name="Text 28"/>
+          <p:cNvSpPr/>
+          <p:nvPr/>
+        </p:nvSpPr>
+        <p:spPr>
+          <a:xfrm>
+            <a:off x="3063240" y="3566160"/>
+            <a:ext cx="5212080" cy="274320"/>
+          </a:xfrm>
+          <a:prstGeom prst="rect">
+            <a:avLst/>
+          </a:prstGeom>
+          <a:noFill/>
+          <a:ln/>
+        </p:spPr>
+        <p:txBody>
+          <a:bodyPr wrap="square" lIns="0" tIns="0" rIns="0" bIns="0" rtlCol="0" anchor="ctr"/>
+          <a:lstStyle/>
+          <a:p>
+            <a:pPr indent="0" marL="0">
+              <a:buNone/>
+            </a:pPr>
+            <a:r>
+              <a:rPr lang="en-US" sz="1000" dirty="0">
+                <a:solidFill>
+                  <a:srgbClr val="64748B"/>
+                </a:solidFill>
+                <a:latin typeface="Calibri" pitchFamily="34" charset="0"/>
+                <a:ea typeface="Calibri" pitchFamily="34" charset="-122"/>
+                <a:cs typeface="Calibri" pitchFamily="34" charset="-120"/>
+              </a:rPr>
+              <a:t>新增 check_file_path：14 系统路径 + 4 用户安全路径，读写分级检查</a:t>
+            </a:r>
+            <a:endParaRPr lang="en-US" sz="1000" dirty="0"/>
+          </a:p>
+        </p:txBody>
+      </p:sp>
+      <p:sp>
+        <p:nvSpPr>
+          <p:cNvPr id="31" name="Shape 29"/>
+          <p:cNvSpPr/>
+          <p:nvPr/>
+        </p:nvSpPr>
+        <p:spPr>
+          <a:xfrm>
+            <a:off x="868680" y="3950208"/>
+            <a:ext cx="54864" cy="274320"/>
+          </a:xfrm>
+          <a:prstGeom prst="rect">
+            <a:avLst/>
+          </a:prstGeom>
+          <a:solidFill>
+            <a:srgbClr val="D97706"/>
+          </a:solidFill>
+          <a:ln/>
+        </p:spPr>
+      </p:sp>
+      <p:sp>
+        <p:nvSpPr>
+          <p:cNvPr id="32" name="Text 30"/>
+          <p:cNvSpPr/>
+          <p:nvPr/>
+        </p:nvSpPr>
+        <p:spPr>
+          <a:xfrm>
+            <a:off x="1051560" y="3950208"/>
+            <a:ext cx="2011680" cy="274320"/>
+          </a:xfrm>
+          <a:prstGeom prst="rect">
+            <a:avLst/>
+          </a:prstGeom>
+          <a:noFill/>
+          <a:ln/>
+        </p:spPr>
+        <p:txBody>
+          <a:bodyPr wrap="square" lIns="0" tIns="0" rIns="0" bIns="0" rtlCol="0" anchor="ctr"/>
+          <a:lstStyle/>
+          <a:p>
+            <a:pPr indent="0" marL="0">
+              <a:buNone/>
+            </a:pPr>
+            <a:r>
+              <a:rPr lang="en-US" sz="1000" b="1" dirty="0">
+                <a:solidFill>
+                  <a:srgbClr val="1E293B"/>
+                </a:solidFill>
+                <a:latin typeface="Calibri" pitchFamily="34" charset="0"/>
+                <a:ea typeface="Calibri" pitchFamily="34" charset="-122"/>
+                <a:cs typeface="Calibri" pitchFamily="34" charset="-120"/>
+              </a:rPr>
+              <a:t>API 超时死循环</a:t>
+            </a:r>
+            <a:endParaRPr lang="en-US" sz="1000" dirty="0"/>
+          </a:p>
+        </p:txBody>
+      </p:sp>
+      <p:sp>
+        <p:nvSpPr>
+          <p:cNvPr id="33" name="Text 31"/>
+          <p:cNvSpPr/>
+          <p:nvPr/>
+        </p:nvSpPr>
+        <p:spPr>
+          <a:xfrm>
+            <a:off x="3063240" y="3950208"/>
+            <a:ext cx="5212080" cy="274320"/>
+          </a:xfrm>
+          <a:prstGeom prst="rect">
+            <a:avLst/>
+          </a:prstGeom>
+          <a:noFill/>
+          <a:ln/>
+        </p:spPr>
+        <p:txBody>
+          <a:bodyPr wrap="square" lIns="0" tIns="0" rIns="0" bIns="0" rtlCol="0" anchor="ctr"/>
+          <a:lstStyle/>
+          <a:p>
+            <a:pPr indent="0" marL="0">
+              <a:buNone/>
+            </a:pPr>
+            <a:r>
+              <a:rPr lang="en-US" sz="1000" dirty="0">
+                <a:solidFill>
+                  <a:srgbClr val="64748B"/>
+                </a:solidFill>
+                <a:latin typeface="Calibri" pitchFamily="34" charset="0"/>
+                <a:ea typeface="Calibri" pitchFamily="34" charset="-122"/>
+                <a:cs typeface="Calibri" pitchFamily="34" charset="-120"/>
+              </a:rPr>
+              <a:t>退避重试(2s→4s→8s) + 超时错误不污染对话历史</a:t>
+            </a:r>
+            <a:endParaRPr lang="en-US" sz="1000" dirty="0"/>
+          </a:p>
+        </p:txBody>
+      </p:sp>
+      <p:sp>
+        <p:nvSpPr>
+          <p:cNvPr id="34" name="Shape 32"/>
+          <p:cNvSpPr/>
+          <p:nvPr/>
+        </p:nvSpPr>
+        <p:spPr>
+          <a:xfrm>
+            <a:off x="868680" y="4334256"/>
+            <a:ext cx="54864" cy="274320"/>
+          </a:xfrm>
+          <a:prstGeom prst="rect">
+            <a:avLst/>
+          </a:prstGeom>
+          <a:solidFill>
+            <a:srgbClr val="D97706"/>
+          </a:solidFill>
+          <a:ln/>
+        </p:spPr>
+      </p:sp>
+      <p:sp>
+        <p:nvSpPr>
+          <p:cNvPr id="35" name="Text 33"/>
+          <p:cNvSpPr/>
+          <p:nvPr/>
+        </p:nvSpPr>
+        <p:spPr>
+          <a:xfrm>
+            <a:off x="1051560" y="4334256"/>
+            <a:ext cx="2011680" cy="274320"/>
+          </a:xfrm>
+          <a:prstGeom prst="rect">
+            <a:avLst/>
+          </a:prstGeom>
+          <a:noFill/>
+          <a:ln/>
+        </p:spPr>
+        <p:txBody>
+          <a:bodyPr wrap="square" lIns="0" tIns="0" rIns="0" bIns="0" rtlCol="0" anchor="ctr"/>
+          <a:lstStyle/>
+          <a:p>
+            <a:pPr indent="0" marL="0">
+              <a:buNone/>
+            </a:pPr>
+            <a:r>
+              <a:rPr lang="en-US" sz="1000" b="1" dirty="0">
+                <a:solidFill>
+                  <a:srgbClr val="1E293B"/>
+                </a:solidFill>
+                <a:latin typeface="Calibri" pitchFamily="34" charset="0"/>
+                <a:ea typeface="Calibri" pitchFamily="34" charset="-122"/>
+                <a:cs typeface="Calibri" pitchFamily="34" charset="-120"/>
+              </a:rPr>
+              <a:t>工作区路径漂移</a:t>
+            </a:r>
+            <a:endParaRPr lang="en-US" sz="1000" dirty="0"/>
+          </a:p>
+        </p:txBody>
+      </p:sp>
+      <p:sp>
+        <p:nvSpPr>
+          <p:cNvPr id="36" name="Text 34"/>
+          <p:cNvSpPr/>
+          <p:nvPr/>
+        </p:nvSpPr>
+        <p:spPr>
+          <a:xfrm>
+            <a:off x="3063240" y="4334256"/>
+            <a:ext cx="5212080" cy="274320"/>
+          </a:xfrm>
+          <a:prstGeom prst="rect">
+            <a:avLst/>
+          </a:prstGeom>
+          <a:noFill/>
+          <a:ln/>
+        </p:spPr>
+        <p:txBody>
+          <a:bodyPr wrap="square" lIns="0" tIns="0" rIns="0" bIns="0" rtlCol="0" anchor="ctr"/>
+          <a:lstStyle/>
+          <a:p>
+            <a:pPr indent="0" marL="0">
+              <a:buNone/>
+            </a:pPr>
+            <a:r>
+              <a:rPr lang="en-US" sz="1000" dirty="0">
+                <a:solidFill>
+                  <a:srgbClr val="64748B"/>
+                </a:solidFill>
+                <a:latin typeface="Calibri" pitchFamily="34" charset="0"/>
+                <a:ea typeface="Calibri" pitchFamily="34" charset="-122"/>
+                <a:cs typeface="Calibri" pitchFamily="34" charset="-120"/>
+              </a:rPr>
+              <a:t>ScriptExecutor 改用 __file__ 相对路径，替代 os.getcwd()</a:t>
+            </a:r>
+            <a:endParaRPr lang="en-US" sz="1000" dirty="0"/>
+          </a:p>
+        </p:txBody>
+      </p:sp>
+      <p:sp>
+        <p:nvSpPr>
+          <p:cNvPr id="37" name="Text 35"/>
+          <p:cNvSpPr/>
+          <p:nvPr/>
+        </p:nvSpPr>
+        <p:spPr>
+          <a:xfrm>
+            <a:off x="8412480" y="4709160"/>
+            <a:ext cx="548640" cy="320040"/>
+          </a:xfrm>
+          <a:prstGeom prst="rect">
+            <a:avLst/>
+          </a:prstGeom>
+          <a:noFill/>
+          <a:ln/>
+        </p:spPr>
+        <p:txBody>
+          <a:bodyPr wrap="square" rtlCol="0" anchor="ctr"/>
+          <a:lstStyle/>
+          <a:p>
+            <a:pPr algn="r" indent="0" marL="0">
+              <a:buNone/>
+            </a:pPr>
+            <a:r>
+              <a:rPr lang="en-US" sz="1000" dirty="0">
+                <a:solidFill>
+                  <a:srgbClr val="64748B"/>
+                </a:solidFill>
+                <a:latin typeface="Calibri" pitchFamily="34" charset="0"/>
+                <a:ea typeface="Calibri" pitchFamily="34" charset="-122"/>
+                <a:cs typeface="Calibri" pitchFamily="34" charset="-120"/>
+              </a:rPr>
+              <a:t>7</a:t>
+            </a:r>
+            <a:endParaRPr lang="en-US" sz="1000" dirty="0"/>
+          </a:p>
+        </p:txBody>
+      </p:sp>
+    </p:spTree>
+  </p:cSld>
+  <p:clrMapOvr>
+    <a:masterClrMapping/>
+  </p:clrMapOvr>
+</p:sld>
+</file>
+
+<file path=ppt/slides/slide8.xml><?xml version="1.0" encoding="utf-8"?>
+<p:sld xmlns:a="http://schemas.openxmlformats.org/drawingml/2006/main" xmlns:r="http://schemas.openxmlformats.org/officeDocument/2006/relationships" xmlns:p="http://schemas.openxmlformats.org/presentationml/2006/main">
+  <p:cSld name="Slide 8">
+    <p:bg>
+      <p:bgPr>
+        <a:solidFill>
+          <a:srgbClr val="FFFFFF"/>
+        </a:solidFill>
+      </p:bgPr>
+    </p:bg>
+    <p:spTree>
+      <p:nvGrpSpPr>
+        <p:cNvPr id="1" name=""/>
+        <p:cNvGrpSpPr/>
+        <p:nvPr/>
+      </p:nvGrpSpPr>
+      <p:grpSpPr>
+        <a:xfrm>
+          <a:off x="0" y="0"/>
+          <a:ext cx="0" cy="0"/>
+          <a:chOff x="0" y="0"/>
+          <a:chExt cx="0" cy="0"/>
+        </a:xfrm>
+      </p:grpSpPr>
+      <p:sp>
+        <p:nvSpPr>
+          <p:cNvPr id="2" name="Shape 0"/>
+          <p:cNvSpPr/>
+          <p:nvPr/>
+        </p:nvSpPr>
+        <p:spPr>
+          <a:xfrm>
+            <a:off x="0" y="0"/>
+            <a:ext cx="54864" cy="5143500"/>
+          </a:xfrm>
+          <a:prstGeom prst="rect">
+            <a:avLst/>
+          </a:prstGeom>
+          <a:solidFill>
+            <a:srgbClr val="028090"/>
+          </a:solidFill>
+          <a:ln/>
+        </p:spPr>
+      </p:sp>
+      <p:sp>
+        <p:nvSpPr>
+          <p:cNvPr id="3" name="Text 1"/>
+          <p:cNvSpPr/>
+          <p:nvPr/>
+        </p:nvSpPr>
+        <p:spPr>
+          <a:xfrm>
+            <a:off x="594360" y="228600"/>
+            <a:ext cx="8046720" cy="457200"/>
+          </a:xfrm>
+          <a:prstGeom prst="rect">
+            <a:avLst/>
+          </a:prstGeom>
+          <a:noFill/>
+          <a:ln/>
+        </p:spPr>
+        <p:txBody>
+          <a:bodyPr wrap="square" lIns="0" tIns="0" rIns="0" bIns="0" rtlCol="0" anchor="ctr"/>
+          <a:lstStyle/>
+          <a:p>
+            <a:pPr indent="0" marL="0">
+              <a:buNone/>
+            </a:pPr>
+            <a:r>
+              <a:rPr lang="en-US" sz="2800" b="1" dirty="0">
+                <a:solidFill>
+                  <a:srgbClr val="1E293B"/>
+                </a:solidFill>
+                <a:latin typeface="Cambria" pitchFamily="34" charset="0"/>
+                <a:ea typeface="Cambria" pitchFamily="34" charset="-122"/>
+                <a:cs typeface="Cambria" pitchFamily="34" charset="-120"/>
+              </a:rPr>
+              <a:t>开发过程与版本迭代</a:t>
+            </a:r>
+            <a:endParaRPr lang="en-US" sz="2800" dirty="0"/>
+          </a:p>
+        </p:txBody>
+      </p:sp>
+      <p:sp>
+        <p:nvSpPr>
+          <p:cNvPr id="4" name="Shape 2"/>
+          <p:cNvSpPr/>
+          <p:nvPr/>
+        </p:nvSpPr>
+        <p:spPr>
+          <a:xfrm>
+            <a:off x="594360" y="731520"/>
+            <a:ext cx="1097280" cy="36576"/>
+          </a:xfrm>
+          <a:prstGeom prst="rect">
+            <a:avLst/>
+          </a:prstGeom>
+          <a:solidFill>
+            <a:srgbClr val="028090"/>
+          </a:solidFill>
+          <a:ln/>
+        </p:spPr>
+      </p:sp>
+      <p:sp>
+        <p:nvSpPr>
+          <p:cNvPr id="5" name="Text 3"/>
+          <p:cNvSpPr/>
+          <p:nvPr/>
+        </p:nvSpPr>
+        <p:spPr>
+          <a:xfrm>
+            <a:off x="594360" y="868680"/>
+            <a:ext cx="8046720" cy="274320"/>
+          </a:xfrm>
+          <a:prstGeom prst="rect">
+            <a:avLst/>
+          </a:prstGeom>
+          <a:noFill/>
+          <a:ln/>
+        </p:spPr>
+        <p:txBody>
+          <a:bodyPr wrap="square" lIns="0" tIns="0" rIns="0" bIns="0" rtlCol="0" anchor="ctr"/>
+          <a:lstStyle/>
+          <a:p>
+            <a:pPr indent="0" marL="0">
+              <a:buNone/>
+            </a:pPr>
+            <a:r>
+              <a:rPr lang="en-US" sz="1200" dirty="0">
+                <a:solidFill>
+                  <a:srgbClr val="64748B"/>
+                </a:solidFill>
+                <a:latin typeface="Calibri" pitchFamily="34" charset="0"/>
+                <a:ea typeface="Calibri" pitchFamily="34" charset="-122"/>
+                <a:cs typeface="Calibri" pitchFamily="34" charset="-120"/>
+              </a:rPr>
               <a:t>16 次 Git Commit · 从原型到完整 Agent 系统</a:t>
             </a:r>
             <a:endParaRPr lang="en-US" sz="1200" dirty="0"/>
@@ -8912,7 +11782,7 @@
       </p:sp>
       <p:graphicFrame>
         <p:nvGraphicFramePr>
-          <p:cNvPr id="8" name="Table 0"/>
+          <p:cNvPr id="9" name="Table 0"/>
           <p:cNvGraphicFramePr>
             <a:graphicFrameLocks noGrp="1"/>
           </p:cNvGraphicFramePr>
@@ -10070,7 +12940,7 @@
                 <a:ea typeface="Calibri" pitchFamily="34" charset="-122"/>
                 <a:cs typeface="Calibri" pitchFamily="34" charset="-120"/>
               </a:rPr>
-              <a:t>7</a:t>
+              <a:t>8</a:t>
             </a:r>
             <a:endParaRPr lang="en-US" sz="1000" dirty="0"/>
           </a:p>
@@ -10084,9 +12954,9 @@
 </p:sld>
 </file>
 
-<file path=ppt/slides/slide8.xml><?xml version="1.0" encoding="utf-8"?>
+<file path=ppt/slides/slide9.xml><?xml version="1.0" encoding="utf-8"?>
 <p:sld xmlns:a="http://schemas.openxmlformats.org/drawingml/2006/main" xmlns:r="http://schemas.openxmlformats.org/officeDocument/2006/relationships" xmlns:p="http://schemas.openxmlformats.org/presentationml/2006/main">
-  <p:cSld name="Slide 8">
+  <p:cSld name="Slide 9">
     <p:bg>
       <p:bgPr>
         <a:solidFill>
@@ -10228,7 +13098,7 @@
       </p:sp>
       <p:graphicFrame>
         <p:nvGraphicFramePr>
-          <p:cNvPr id="9" name="Table 0"/>
+          <p:cNvPr id="10" name="Table 0"/>
           <p:cNvGraphicFramePr>
             <a:graphicFrameLocks noGrp="1"/>
           </p:cNvGraphicFramePr>
@@ -11720,7 +14590,7 @@
                 <a:ea typeface="Calibri" pitchFamily="34" charset="-122"/>
                 <a:cs typeface="Calibri" pitchFamily="34" charset="-120"/>
               </a:rPr>
-              <a:t>8</a:t>
+              <a:t>9</a:t>
             </a:r>
             <a:endParaRPr lang="en-US" sz="1000" dirty="0"/>
           </a:p>
